--- a/DIAGRAMAS.pptx
+++ b/DIAGRAMAS.pptx
@@ -3623,7 +3623,7 @@
           <a:p>
             <a:fld id="{648875B9-81E3-48EB-AC45-E2B16239D10D}" type="datetimeFigureOut">
               <a:rPr lang="es-ES" smtClean="0"/>
-              <a:t>06/07/2026</a:t>
+              <a:t>08/07/2026</a:t>
             </a:fld>
             <a:endParaRPr lang="es-ES"/>
           </a:p>
@@ -4337,7 +4337,7 @@
           <a:p>
             <a:fld id="{31F888AD-2037-4E90-B50F-EBB1A322544F}" type="datetimeFigureOut">
               <a:rPr lang="es-ES" smtClean="0"/>
-              <a:t>06/07/2026</a:t>
+              <a:t>08/07/2026</a:t>
             </a:fld>
             <a:endParaRPr lang="es-ES"/>
           </a:p>
@@ -4535,7 +4535,7 @@
           <a:p>
             <a:fld id="{31F888AD-2037-4E90-B50F-EBB1A322544F}" type="datetimeFigureOut">
               <a:rPr lang="es-ES" smtClean="0"/>
-              <a:t>06/07/2026</a:t>
+              <a:t>08/07/2026</a:t>
             </a:fld>
             <a:endParaRPr lang="es-ES"/>
           </a:p>
@@ -4743,7 +4743,7 @@
           <a:p>
             <a:fld id="{31F888AD-2037-4E90-B50F-EBB1A322544F}" type="datetimeFigureOut">
               <a:rPr lang="es-ES" smtClean="0"/>
-              <a:t>06/07/2026</a:t>
+              <a:t>08/07/2026</a:t>
             </a:fld>
             <a:endParaRPr lang="es-ES"/>
           </a:p>
@@ -4976,7 +4976,7 @@
           <a:p>
             <a:fld id="{31F888AD-2037-4E90-B50F-EBB1A322544F}" type="datetimeFigureOut">
               <a:rPr lang="es-ES" smtClean="0"/>
-              <a:t>06/07/2026</a:t>
+              <a:t>08/07/2026</a:t>
             </a:fld>
             <a:endParaRPr lang="es-ES"/>
           </a:p>
@@ -5251,7 +5251,7 @@
           <a:p>
             <a:fld id="{31F888AD-2037-4E90-B50F-EBB1A322544F}" type="datetimeFigureOut">
               <a:rPr lang="es-ES" smtClean="0"/>
-              <a:t>06/07/2026</a:t>
+              <a:t>08/07/2026</a:t>
             </a:fld>
             <a:endParaRPr lang="es-ES"/>
           </a:p>
@@ -5516,7 +5516,7 @@
           <a:p>
             <a:fld id="{31F888AD-2037-4E90-B50F-EBB1A322544F}" type="datetimeFigureOut">
               <a:rPr lang="es-ES" smtClean="0"/>
-              <a:t>06/07/2026</a:t>
+              <a:t>08/07/2026</a:t>
             </a:fld>
             <a:endParaRPr lang="es-ES"/>
           </a:p>
@@ -5928,7 +5928,7 @@
           <a:p>
             <a:fld id="{31F888AD-2037-4E90-B50F-EBB1A322544F}" type="datetimeFigureOut">
               <a:rPr lang="es-ES" smtClean="0"/>
-              <a:t>06/07/2026</a:t>
+              <a:t>08/07/2026</a:t>
             </a:fld>
             <a:endParaRPr lang="es-ES"/>
           </a:p>
@@ -6069,7 +6069,7 @@
           <a:p>
             <a:fld id="{31F888AD-2037-4E90-B50F-EBB1A322544F}" type="datetimeFigureOut">
               <a:rPr lang="es-ES" smtClean="0"/>
-              <a:t>06/07/2026</a:t>
+              <a:t>08/07/2026</a:t>
             </a:fld>
             <a:endParaRPr lang="es-ES"/>
           </a:p>
@@ -6182,7 +6182,7 @@
           <a:p>
             <a:fld id="{31F888AD-2037-4E90-B50F-EBB1A322544F}" type="datetimeFigureOut">
               <a:rPr lang="es-ES" smtClean="0"/>
-              <a:t>06/07/2026</a:t>
+              <a:t>08/07/2026</a:t>
             </a:fld>
             <a:endParaRPr lang="es-ES"/>
           </a:p>
@@ -6493,7 +6493,7 @@
           <a:p>
             <a:fld id="{31F888AD-2037-4E90-B50F-EBB1A322544F}" type="datetimeFigureOut">
               <a:rPr lang="es-ES" smtClean="0"/>
-              <a:t>06/07/2026</a:t>
+              <a:t>08/07/2026</a:t>
             </a:fld>
             <a:endParaRPr lang="es-ES"/>
           </a:p>
@@ -6781,7 +6781,7 @@
           <a:p>
             <a:fld id="{31F888AD-2037-4E90-B50F-EBB1A322544F}" type="datetimeFigureOut">
               <a:rPr lang="es-ES" smtClean="0"/>
-              <a:t>06/07/2026</a:t>
+              <a:t>08/07/2026</a:t>
             </a:fld>
             <a:endParaRPr lang="es-ES"/>
           </a:p>
@@ -7022,7 +7022,7 @@
           <a:p>
             <a:fld id="{31F888AD-2037-4E90-B50F-EBB1A322544F}" type="datetimeFigureOut">
               <a:rPr lang="es-ES" smtClean="0"/>
-              <a:t>06/07/2026</a:t>
+              <a:t>08/07/2026</a:t>
             </a:fld>
             <a:endParaRPr lang="es-ES"/>
           </a:p>
@@ -7490,7 +7490,7 @@
 </file>
 
 <file path=ppt/slides/slide2.xml><?xml version="1.0" encoding="utf-8"?>
-<p:sld xmlns:a="http://schemas.openxmlformats.org/drawingml/2006/main" xmlns:r="http://schemas.openxmlformats.org/officeDocument/2006/relationships" xmlns:p="http://schemas.openxmlformats.org/presentationml/2006/main">
+<p:sld xmlns:a="http://schemas.openxmlformats.org/drawingml/2006/main" xmlns:r="http://schemas.openxmlformats.org/officeDocument/2006/relationships" xmlns:p="http://schemas.openxmlformats.org/presentationml/2006/main" show="0">
   <p:cSld>
     <p:spTree>
       <p:nvGrpSpPr>
@@ -7548,7 +7548,7 @@
 </file>
 
 <file path=ppt/slides/slide3.xml><?xml version="1.0" encoding="utf-8"?>
-<p:sld xmlns:a="http://schemas.openxmlformats.org/drawingml/2006/main" xmlns:r="http://schemas.openxmlformats.org/officeDocument/2006/relationships" xmlns:p="http://schemas.openxmlformats.org/presentationml/2006/main">
+<p:sld xmlns:a="http://schemas.openxmlformats.org/drawingml/2006/main" xmlns:r="http://schemas.openxmlformats.org/officeDocument/2006/relationships" xmlns:p="http://schemas.openxmlformats.org/presentationml/2006/main" show="0">
   <p:cSld>
     <p:spTree>
       <p:nvGrpSpPr>
@@ -7630,6 +7630,3005 @@
           <a:chExt cx="0" cy="0"/>
         </a:xfrm>
       </p:grpSpPr>
+      <p:grpSp>
+        <p:nvGrpSpPr>
+          <p:cNvPr id="3" name="Grupo 2">
+            <a:extLst>
+              <a:ext uri="{FF2B5EF4-FFF2-40B4-BE49-F238E27FC236}">
+                <a16:creationId xmlns:a16="http://schemas.microsoft.com/office/drawing/2014/main" id="{685CF536-294F-BD2E-4800-A35A8C9773D1}"/>
+              </a:ext>
+            </a:extLst>
+          </p:cNvPr>
+          <p:cNvGrpSpPr/>
+          <p:nvPr/>
+        </p:nvGrpSpPr>
+        <p:grpSpPr>
+          <a:xfrm>
+            <a:off x="191298" y="520757"/>
+            <a:ext cx="11855922" cy="6133628"/>
+            <a:chOff x="9176023" y="3484762"/>
+            <a:chExt cx="11855922" cy="5576025"/>
+          </a:xfrm>
+        </p:grpSpPr>
+        <p:grpSp>
+          <p:nvGrpSpPr>
+            <p:cNvPr id="4" name="Grupo 3">
+              <a:extLst>
+                <a:ext uri="{FF2B5EF4-FFF2-40B4-BE49-F238E27FC236}">
+                  <a16:creationId xmlns:a16="http://schemas.microsoft.com/office/drawing/2014/main" id="{DCD86CCF-3C3D-5BA5-0E8B-BAB5DBF9CC6F}"/>
+                </a:ext>
+              </a:extLst>
+            </p:cNvPr>
+            <p:cNvGrpSpPr/>
+            <p:nvPr/>
+          </p:nvGrpSpPr>
+          <p:grpSpPr>
+            <a:xfrm>
+              <a:off x="9176023" y="3484762"/>
+              <a:ext cx="11855922" cy="5576025"/>
+              <a:chOff x="4465067" y="1125280"/>
+              <a:chExt cx="11855903" cy="5576025"/>
+            </a:xfrm>
+          </p:grpSpPr>
+          <p:sp>
+            <p:nvSpPr>
+              <p:cNvPr id="6" name="Shape 13">
+                <a:extLst>
+                  <a:ext uri="{FF2B5EF4-FFF2-40B4-BE49-F238E27FC236}">
+                    <a16:creationId xmlns:a16="http://schemas.microsoft.com/office/drawing/2014/main" id="{88E4DE1D-6261-FB07-F7CB-1E6EFE93707B}"/>
+                  </a:ext>
+                </a:extLst>
+              </p:cNvPr>
+              <p:cNvSpPr/>
+              <p:nvPr/>
+            </p:nvSpPr>
+            <p:spPr>
+              <a:xfrm>
+                <a:off x="4465067" y="1125280"/>
+                <a:ext cx="11855903" cy="5576025"/>
+              </a:xfrm>
+              <a:prstGeom prst="roundRect">
+                <a:avLst>
+                  <a:gd name="adj" fmla="val 9259"/>
+                </a:avLst>
+              </a:prstGeom>
+              <a:solidFill>
+                <a:srgbClr val="FFFDE7"/>
+              </a:solidFill>
+              <a:ln w="19050">
+                <a:solidFill>
+                  <a:srgbClr val="F9A825"/>
+                </a:solidFill>
+                <a:prstDash val="solid"/>
+              </a:ln>
+            </p:spPr>
+            <p:txBody>
+              <a:bodyPr/>
+              <a:lstStyle/>
+              <a:p>
+                <a:endParaRPr lang="es-ES" dirty="0"/>
+              </a:p>
+            </p:txBody>
+          </p:sp>
+          <p:sp>
+            <p:nvSpPr>
+              <p:cNvPr id="7" name="Text 14">
+                <a:extLst>
+                  <a:ext uri="{FF2B5EF4-FFF2-40B4-BE49-F238E27FC236}">
+                    <a16:creationId xmlns:a16="http://schemas.microsoft.com/office/drawing/2014/main" id="{D190C84C-4E80-502A-B065-8AD57E72939D}"/>
+                  </a:ext>
+                </a:extLst>
+              </p:cNvPr>
+              <p:cNvSpPr/>
+              <p:nvPr/>
+            </p:nvSpPr>
+            <p:spPr>
+              <a:xfrm>
+                <a:off x="4938297" y="1228235"/>
+                <a:ext cx="1512346" cy="493776"/>
+              </a:xfrm>
+              <a:prstGeom prst="rect">
+                <a:avLst/>
+              </a:prstGeom>
+              <a:noFill/>
+              <a:ln/>
+            </p:spPr>
+            <p:txBody>
+              <a:bodyPr wrap="square" lIns="25400" tIns="25400" rIns="25400" bIns="25400" rtlCol="0" anchor="ctr"/>
+              <a:lstStyle/>
+              <a:p>
+                <a:pPr marL="0" indent="0" algn="ctr">
+                  <a:buNone/>
+                </a:pPr>
+                <a:r>
+                  <a:rPr lang="en-US" b="1" dirty="0">
+                    <a:solidFill>
+                      <a:srgbClr val="212121"/>
+                    </a:solidFill>
+                    <a:latin typeface="Calibri" pitchFamily="34" charset="0"/>
+                    <a:ea typeface="Calibri" pitchFamily="34" charset="-122"/>
+                    <a:cs typeface="Calibri" pitchFamily="34" charset="-120"/>
+                  </a:rPr>
+                  <a:t>Feed GTFS</a:t>
+                </a:r>
+                <a:endParaRPr lang="en-US" dirty="0"/>
+              </a:p>
+            </p:txBody>
+          </p:sp>
+        </p:grpSp>
+        <p:pic>
+          <p:nvPicPr>
+            <p:cNvPr id="5" name="Gráfico 4" descr="Carpeta abierta con relleno sólido">
+              <a:extLst>
+                <a:ext uri="{FF2B5EF4-FFF2-40B4-BE49-F238E27FC236}">
+                  <a16:creationId xmlns:a16="http://schemas.microsoft.com/office/drawing/2014/main" id="{AD6434E2-E017-A958-F5D5-E99525453BCD}"/>
+                </a:ext>
+              </a:extLst>
+            </p:cNvPr>
+            <p:cNvPicPr>
+              <a:picLocks noChangeAspect="1"/>
+            </p:cNvPicPr>
+            <p:nvPr/>
+          </p:nvPicPr>
+          <p:blipFill>
+            <a:blip>
+              <a:extLst>
+                <a:ext uri="{96DAC541-7B7A-43D3-8B79-37D633B846F1}">
+                  <asvg:svgBlip xmlns:asvg="http://schemas.microsoft.com/office/drawing/2016/SVG/main" r:embed="rId2"/>
+                </a:ext>
+              </a:extLst>
+            </a:blip>
+            <a:stretch>
+              <a:fillRect/>
+            </a:stretch>
+          </p:blipFill>
+          <p:spPr>
+            <a:xfrm>
+              <a:off x="9494209" y="3673917"/>
+              <a:ext cx="354433" cy="354433"/>
+            </a:xfrm>
+            <a:prstGeom prst="rect">
+              <a:avLst/>
+            </a:prstGeom>
+          </p:spPr>
+        </p:pic>
+      </p:grpSp>
+      <p:cxnSp>
+        <p:nvCxnSpPr>
+          <p:cNvPr id="134" name="Conector recto de flecha 133">
+            <a:extLst>
+              <a:ext uri="{FF2B5EF4-FFF2-40B4-BE49-F238E27FC236}">
+                <a16:creationId xmlns:a16="http://schemas.microsoft.com/office/drawing/2014/main" id="{8F063A0A-42FB-04D4-7599-5F5B393679CB}"/>
+              </a:ext>
+            </a:extLst>
+          </p:cNvPr>
+          <p:cNvCxnSpPr>
+            <a:cxnSpLocks/>
+          </p:cNvCxnSpPr>
+          <p:nvPr/>
+        </p:nvCxnSpPr>
+        <p:spPr>
+          <a:xfrm>
+            <a:off x="1059180" y="1918737"/>
+            <a:ext cx="10182710" cy="7288"/>
+          </a:xfrm>
+          <a:prstGeom prst="straightConnector1">
+            <a:avLst/>
+          </a:prstGeom>
+          <a:ln w="57150">
+            <a:solidFill>
+              <a:srgbClr val="0070C0"/>
+            </a:solidFill>
+            <a:tailEnd type="triangle"/>
+          </a:ln>
+        </p:spPr>
+        <p:style>
+          <a:lnRef idx="2">
+            <a:schemeClr val="accent1"/>
+          </a:lnRef>
+          <a:fillRef idx="0">
+            <a:schemeClr val="accent1"/>
+          </a:fillRef>
+          <a:effectRef idx="1">
+            <a:schemeClr val="accent1"/>
+          </a:effectRef>
+          <a:fontRef idx="minor">
+            <a:schemeClr val="tx1"/>
+          </a:fontRef>
+        </p:style>
+      </p:cxnSp>
+      <p:grpSp>
+        <p:nvGrpSpPr>
+          <p:cNvPr id="8" name="Grupo 7">
+            <a:extLst>
+              <a:ext uri="{FF2B5EF4-FFF2-40B4-BE49-F238E27FC236}">
+                <a16:creationId xmlns:a16="http://schemas.microsoft.com/office/drawing/2014/main" id="{E138BE67-396D-DE43-8735-C4F42BDE7F3F}"/>
+              </a:ext>
+            </a:extLst>
+          </p:cNvPr>
+          <p:cNvGrpSpPr/>
+          <p:nvPr/>
+        </p:nvGrpSpPr>
+        <p:grpSpPr>
+          <a:xfrm>
+            <a:off x="2067789" y="638288"/>
+            <a:ext cx="1390604" cy="576930"/>
+            <a:chOff x="10520612" y="4604951"/>
+            <a:chExt cx="1390604" cy="576930"/>
+          </a:xfrm>
+        </p:grpSpPr>
+        <p:sp>
+          <p:nvSpPr>
+            <p:cNvPr id="9" name="Shape 53">
+              <a:extLst>
+                <a:ext uri="{FF2B5EF4-FFF2-40B4-BE49-F238E27FC236}">
+                  <a16:creationId xmlns:a16="http://schemas.microsoft.com/office/drawing/2014/main" id="{CB5A9B24-0B8B-8883-751A-718A4798D4CF}"/>
+                </a:ext>
+              </a:extLst>
+            </p:cNvPr>
+            <p:cNvSpPr/>
+            <p:nvPr/>
+          </p:nvSpPr>
+          <p:spPr>
+            <a:xfrm>
+              <a:off x="10520612" y="4604951"/>
+              <a:ext cx="1390604" cy="576930"/>
+            </a:xfrm>
+            <a:prstGeom prst="roundRect">
+              <a:avLst>
+                <a:gd name="adj" fmla="val 7368"/>
+              </a:avLst>
+            </a:prstGeom>
+            <a:solidFill>
+              <a:srgbClr val="FFFFFF"/>
+            </a:solidFill>
+            <a:ln w="25400">
+              <a:solidFill>
+                <a:srgbClr val="013174"/>
+              </a:solidFill>
+              <a:prstDash val="solid"/>
+            </a:ln>
+            <a:effectLst>
+              <a:outerShdw blurRad="76200" dist="25400" dir="8100000" algn="bl" rotWithShape="0">
+                <a:srgbClr val="000000">
+                  <a:alpha val="10000"/>
+                </a:srgbClr>
+              </a:outerShdw>
+            </a:effectLst>
+          </p:spPr>
+          <p:txBody>
+            <a:bodyPr anchor="b"/>
+            <a:lstStyle/>
+            <a:p>
+              <a:pPr algn="ctr"/>
+              <a:r>
+                <a:rPr lang="en-US" sz="1100" b="1" dirty="0">
+                  <a:solidFill>
+                    <a:srgbClr val="212121"/>
+                  </a:solidFill>
+                  <a:latin typeface="Calibri" pitchFamily="34" charset="0"/>
+                  <a:ea typeface="Calibri" pitchFamily="34" charset="-122"/>
+                  <a:cs typeface="Calibri" pitchFamily="34" charset="-120"/>
+                </a:rPr>
+                <a:t>Bus Urbano Toledo</a:t>
+              </a:r>
+              <a:endParaRPr lang="en-US" sz="1100" dirty="0"/>
+            </a:p>
+          </p:txBody>
+        </p:sp>
+        <p:pic>
+          <p:nvPicPr>
+            <p:cNvPr id="10" name="Imagen 9">
+              <a:extLst>
+                <a:ext uri="{FF2B5EF4-FFF2-40B4-BE49-F238E27FC236}">
+                  <a16:creationId xmlns:a16="http://schemas.microsoft.com/office/drawing/2014/main" id="{F2E18587-485F-BEC8-AA35-8C138B399110}"/>
+                </a:ext>
+              </a:extLst>
+            </p:cNvPr>
+            <p:cNvPicPr>
+              <a:picLocks noChangeAspect="1"/>
+            </p:cNvPicPr>
+            <p:nvPr/>
+          </p:nvPicPr>
+          <p:blipFill>
+            <a:blip r:embed="rId3">
+              <a:extLst>
+                <a:ext uri="{28A0092B-C50C-407E-A947-70E740481C1C}">
+                  <a14:useLocalDpi xmlns:a14="http://schemas.microsoft.com/office/drawing/2010/main" val="0"/>
+                </a:ext>
+              </a:extLst>
+            </a:blip>
+            <a:stretch>
+              <a:fillRect/>
+            </a:stretch>
+          </p:blipFill>
+          <p:spPr>
+            <a:xfrm>
+              <a:off x="10597627" y="4680087"/>
+              <a:ext cx="1286157" cy="211192"/>
+            </a:xfrm>
+            <a:prstGeom prst="rect">
+              <a:avLst/>
+            </a:prstGeom>
+          </p:spPr>
+        </p:pic>
+      </p:grpSp>
+      <p:grpSp>
+        <p:nvGrpSpPr>
+          <p:cNvPr id="60" name="Grupo 59">
+            <a:extLst>
+              <a:ext uri="{FF2B5EF4-FFF2-40B4-BE49-F238E27FC236}">
+                <a16:creationId xmlns:a16="http://schemas.microsoft.com/office/drawing/2014/main" id="{021E5E00-F818-6522-1E2C-4815F139D243}"/>
+              </a:ext>
+            </a:extLst>
+          </p:cNvPr>
+          <p:cNvGrpSpPr/>
+          <p:nvPr/>
+        </p:nvGrpSpPr>
+        <p:grpSpPr>
+          <a:xfrm>
+            <a:off x="1148018" y="2321654"/>
+            <a:ext cx="1269773" cy="1108342"/>
+            <a:chOff x="1080771" y="1712264"/>
+            <a:chExt cx="1277393" cy="1008075"/>
+          </a:xfrm>
+        </p:grpSpPr>
+        <p:grpSp>
+          <p:nvGrpSpPr>
+            <p:cNvPr id="28" name="Grupo 27">
+              <a:extLst>
+                <a:ext uri="{FF2B5EF4-FFF2-40B4-BE49-F238E27FC236}">
+                  <a16:creationId xmlns:a16="http://schemas.microsoft.com/office/drawing/2014/main" id="{75E9914E-5328-2561-EEAA-BE37ED2E84AD}"/>
+                </a:ext>
+              </a:extLst>
+            </p:cNvPr>
+            <p:cNvGrpSpPr/>
+            <p:nvPr/>
+          </p:nvGrpSpPr>
+          <p:grpSpPr>
+            <a:xfrm>
+              <a:off x="1080771" y="1712264"/>
+              <a:ext cx="1269773" cy="1008075"/>
+              <a:chOff x="8922590" y="2336595"/>
+              <a:chExt cx="1269773" cy="1008075"/>
+            </a:xfrm>
+          </p:grpSpPr>
+          <p:sp>
+            <p:nvSpPr>
+              <p:cNvPr id="29" name="Shape 17">
+                <a:extLst>
+                  <a:ext uri="{FF2B5EF4-FFF2-40B4-BE49-F238E27FC236}">
+                    <a16:creationId xmlns:a16="http://schemas.microsoft.com/office/drawing/2014/main" id="{F95B0701-57A1-BA0C-00EC-C66CAAFC7DBB}"/>
+                  </a:ext>
+                </a:extLst>
+              </p:cNvPr>
+              <p:cNvSpPr/>
+              <p:nvPr/>
+            </p:nvSpPr>
+            <p:spPr>
+              <a:xfrm>
+                <a:off x="8922590" y="2336595"/>
+                <a:ext cx="1269773" cy="1008075"/>
+              </a:xfrm>
+              <a:prstGeom prst="roundRect">
+                <a:avLst>
+                  <a:gd name="adj" fmla="val 9259"/>
+                </a:avLst>
+              </a:prstGeom>
+              <a:solidFill>
+                <a:schemeClr val="bg1"/>
+              </a:solidFill>
+              <a:ln w="19050">
+                <a:solidFill>
+                  <a:schemeClr val="bg2">
+                    <a:lumMod val="25000"/>
+                  </a:schemeClr>
+                </a:solidFill>
+                <a:prstDash val="solid"/>
+              </a:ln>
+            </p:spPr>
+            <p:txBody>
+              <a:bodyPr/>
+              <a:lstStyle/>
+              <a:p>
+                <a:endParaRPr lang="es-ES" dirty="0"/>
+              </a:p>
+            </p:txBody>
+          </p:sp>
+          <p:sp>
+            <p:nvSpPr>
+              <p:cNvPr id="30" name="Text 18">
+                <a:extLst>
+                  <a:ext uri="{FF2B5EF4-FFF2-40B4-BE49-F238E27FC236}">
+                    <a16:creationId xmlns:a16="http://schemas.microsoft.com/office/drawing/2014/main" id="{B0E2CD14-AB16-3737-2E7E-0A6D5266DD15}"/>
+                  </a:ext>
+                </a:extLst>
+              </p:cNvPr>
+              <p:cNvSpPr/>
+              <p:nvPr/>
+            </p:nvSpPr>
+            <p:spPr>
+              <a:xfrm>
+                <a:off x="9196911" y="2336596"/>
+                <a:ext cx="938528" cy="543154"/>
+              </a:xfrm>
+              <a:prstGeom prst="rect">
+                <a:avLst/>
+              </a:prstGeom>
+              <a:noFill/>
+              <a:ln/>
+            </p:spPr>
+            <p:txBody>
+              <a:bodyPr wrap="square" lIns="25400" tIns="25400" rIns="25400" bIns="25400" rtlCol="0" anchor="ctr"/>
+              <a:lstStyle/>
+              <a:p>
+                <a:pPr marL="0" indent="0" algn="ctr">
+                  <a:buNone/>
+                </a:pPr>
+                <a:r>
+                  <a:rPr lang="en-US" sz="1200" b="1" dirty="0">
+                    <a:solidFill>
+                      <a:srgbClr val="212121"/>
+                    </a:solidFill>
+                    <a:latin typeface="Calibri" pitchFamily="34" charset="0"/>
+                    <a:ea typeface="Calibri" pitchFamily="34" charset="-122"/>
+                    <a:cs typeface="Calibri" pitchFamily="34" charset="-120"/>
+                  </a:rPr>
+                  <a:t>stops.txt</a:t>
+                </a:r>
+                <a:endParaRPr lang="en-US" sz="1200" dirty="0"/>
+              </a:p>
+            </p:txBody>
+          </p:sp>
+          <p:pic>
+            <p:nvPicPr>
+              <p:cNvPr id="31" name="Gráfico 30">
+                <a:extLst>
+                  <a:ext uri="{FF2B5EF4-FFF2-40B4-BE49-F238E27FC236}">
+                    <a16:creationId xmlns:a16="http://schemas.microsoft.com/office/drawing/2014/main" id="{E3661660-0DEC-0BDC-15C4-765457256C1A}"/>
+                  </a:ext>
+                </a:extLst>
+              </p:cNvPr>
+              <p:cNvPicPr>
+                <a:picLocks noChangeAspect="1"/>
+              </p:cNvPicPr>
+              <p:nvPr/>
+            </p:nvPicPr>
+            <p:blipFill>
+              <a:blip>
+                <a:extLst>
+                  <a:ext uri="{96DAC541-7B7A-43D3-8B79-37D633B846F1}">
+                    <asvg:svgBlip xmlns:asvg="http://schemas.microsoft.com/office/drawing/2016/SVG/main" r:embed="rId4"/>
+                  </a:ext>
+                </a:extLst>
+              </a:blip>
+              <a:stretch>
+                <a:fillRect/>
+              </a:stretch>
+            </p:blipFill>
+            <p:spPr>
+              <a:xfrm>
+                <a:off x="8972660" y="2422268"/>
+                <a:ext cx="389339" cy="389339"/>
+              </a:xfrm>
+              <a:prstGeom prst="rect">
+                <a:avLst/>
+              </a:prstGeom>
+            </p:spPr>
+          </p:pic>
+        </p:grpSp>
+        <p:sp>
+          <p:nvSpPr>
+            <p:cNvPr id="53" name="Text 18">
+              <a:extLst>
+                <a:ext uri="{FF2B5EF4-FFF2-40B4-BE49-F238E27FC236}">
+                  <a16:creationId xmlns:a16="http://schemas.microsoft.com/office/drawing/2014/main" id="{8FD21186-AC0B-376D-19BB-FE92467ABA27}"/>
+                </a:ext>
+              </a:extLst>
+            </p:cNvPr>
+            <p:cNvSpPr/>
+            <p:nvPr/>
+          </p:nvSpPr>
+          <p:spPr>
+            <a:xfrm>
+              <a:off x="1280160" y="2110415"/>
+              <a:ext cx="1078004" cy="609924"/>
+            </a:xfrm>
+            <a:prstGeom prst="rect">
+              <a:avLst/>
+            </a:prstGeom>
+            <a:noFill/>
+            <a:ln/>
+          </p:spPr>
+          <p:txBody>
+            <a:bodyPr wrap="square" lIns="25400" tIns="25400" rIns="25400" bIns="25400" rtlCol="0" anchor="ctr"/>
+            <a:lstStyle/>
+            <a:p>
+              <a:pPr marL="171450" indent="-171450">
+                <a:buFontTx/>
+                <a:buChar char="-"/>
+              </a:pPr>
+              <a:r>
+                <a:rPr lang="en-US" sz="1100" b="1" dirty="0" err="1">
+                  <a:solidFill>
+                    <a:srgbClr val="212121"/>
+                  </a:solidFill>
+                  <a:latin typeface="Consolas" panose="020B0609020204030204" pitchFamily="49" charset="0"/>
+                  <a:ea typeface="Calibri" pitchFamily="34" charset="-122"/>
+                  <a:cs typeface="Calibri" pitchFamily="34" charset="-120"/>
+                </a:rPr>
+                <a:t>stop_id</a:t>
+              </a:r>
+              <a:endParaRPr lang="en-US" sz="1100" b="1" dirty="0">
+                <a:solidFill>
+                  <a:srgbClr val="212121"/>
+                </a:solidFill>
+                <a:latin typeface="Consolas" panose="020B0609020204030204" pitchFamily="49" charset="0"/>
+                <a:ea typeface="Calibri" pitchFamily="34" charset="-122"/>
+                <a:cs typeface="Calibri" pitchFamily="34" charset="-120"/>
+              </a:endParaRPr>
+            </a:p>
+            <a:p>
+              <a:pPr marL="171450" indent="-171450">
+                <a:buFontTx/>
+                <a:buChar char="-"/>
+              </a:pPr>
+              <a:r>
+                <a:rPr lang="en-US" sz="1100" dirty="0" err="1">
+                  <a:solidFill>
+                    <a:srgbClr val="212121"/>
+                  </a:solidFill>
+                  <a:latin typeface="Consolas" panose="020B0609020204030204" pitchFamily="49" charset="0"/>
+                  <a:ea typeface="Calibri" pitchFamily="34" charset="-122"/>
+                  <a:cs typeface="Calibri" pitchFamily="34" charset="-120"/>
+                </a:rPr>
+                <a:t>stop_name</a:t>
+              </a:r>
+              <a:endParaRPr lang="en-US" sz="1100" dirty="0">
+                <a:solidFill>
+                  <a:srgbClr val="212121"/>
+                </a:solidFill>
+                <a:latin typeface="Consolas" panose="020B0609020204030204" pitchFamily="49" charset="0"/>
+                <a:ea typeface="Calibri" pitchFamily="34" charset="-122"/>
+                <a:cs typeface="Calibri" pitchFamily="34" charset="-120"/>
+              </a:endParaRPr>
+            </a:p>
+            <a:p>
+              <a:pPr marL="171450" indent="-171450">
+                <a:buFontTx/>
+                <a:buChar char="-"/>
+              </a:pPr>
+              <a:r>
+                <a:rPr lang="en-US" sz="1100" dirty="0" err="1">
+                  <a:solidFill>
+                    <a:srgbClr val="212121"/>
+                  </a:solidFill>
+                  <a:latin typeface="Consolas" panose="020B0609020204030204" pitchFamily="49" charset="0"/>
+                  <a:ea typeface="Calibri" pitchFamily="34" charset="-122"/>
+                  <a:cs typeface="Calibri" pitchFamily="34" charset="-120"/>
+                </a:rPr>
+                <a:t>lat</a:t>
+              </a:r>
+              <a:r>
+                <a:rPr lang="en-US" sz="1100" dirty="0">
+                  <a:solidFill>
+                    <a:srgbClr val="212121"/>
+                  </a:solidFill>
+                  <a:latin typeface="Consolas" panose="020B0609020204030204" pitchFamily="49" charset="0"/>
+                  <a:ea typeface="Calibri" pitchFamily="34" charset="-122"/>
+                  <a:cs typeface="Calibri" pitchFamily="34" charset="-120"/>
+                </a:rPr>
+                <a:t>/</a:t>
+              </a:r>
+              <a:r>
+                <a:rPr lang="en-US" sz="1100" dirty="0" err="1">
+                  <a:solidFill>
+                    <a:srgbClr val="212121"/>
+                  </a:solidFill>
+                  <a:latin typeface="Consolas" panose="020B0609020204030204" pitchFamily="49" charset="0"/>
+                  <a:ea typeface="Calibri" pitchFamily="34" charset="-122"/>
+                  <a:cs typeface="Calibri" pitchFamily="34" charset="-120"/>
+                </a:rPr>
+                <a:t>lon</a:t>
+              </a:r>
+              <a:endParaRPr lang="en-US" sz="1100" dirty="0">
+                <a:latin typeface="Consolas" panose="020B0609020204030204" pitchFamily="49" charset="0"/>
+              </a:endParaRPr>
+            </a:p>
+          </p:txBody>
+        </p:sp>
+      </p:grpSp>
+      <p:grpSp>
+        <p:nvGrpSpPr>
+          <p:cNvPr id="61" name="Grupo 60">
+            <a:extLst>
+              <a:ext uri="{FF2B5EF4-FFF2-40B4-BE49-F238E27FC236}">
+                <a16:creationId xmlns:a16="http://schemas.microsoft.com/office/drawing/2014/main" id="{3F5C1EC9-0C62-569A-FD16-51B7BBE62B6B}"/>
+              </a:ext>
+            </a:extLst>
+          </p:cNvPr>
+          <p:cNvGrpSpPr/>
+          <p:nvPr/>
+        </p:nvGrpSpPr>
+        <p:grpSpPr>
+          <a:xfrm>
+            <a:off x="3643912" y="2066957"/>
+            <a:ext cx="1629789" cy="1618133"/>
+            <a:chOff x="1080771" y="1712264"/>
+            <a:chExt cx="1639569" cy="1471747"/>
+          </a:xfrm>
+        </p:grpSpPr>
+        <p:grpSp>
+          <p:nvGrpSpPr>
+            <p:cNvPr id="62" name="Grupo 61">
+              <a:extLst>
+                <a:ext uri="{FF2B5EF4-FFF2-40B4-BE49-F238E27FC236}">
+                  <a16:creationId xmlns:a16="http://schemas.microsoft.com/office/drawing/2014/main" id="{975555C2-1244-8468-07DB-73D7460E8B08}"/>
+                </a:ext>
+              </a:extLst>
+            </p:cNvPr>
+            <p:cNvGrpSpPr/>
+            <p:nvPr/>
+          </p:nvGrpSpPr>
+          <p:grpSpPr>
+            <a:xfrm>
+              <a:off x="1080771" y="1712264"/>
+              <a:ext cx="1639569" cy="1471747"/>
+              <a:chOff x="8922590" y="2336595"/>
+              <a:chExt cx="1639569" cy="1471747"/>
+            </a:xfrm>
+          </p:grpSpPr>
+          <p:sp>
+            <p:nvSpPr>
+              <p:cNvPr id="64" name="Shape 17">
+                <a:extLst>
+                  <a:ext uri="{FF2B5EF4-FFF2-40B4-BE49-F238E27FC236}">
+                    <a16:creationId xmlns:a16="http://schemas.microsoft.com/office/drawing/2014/main" id="{366AA2F9-9E8E-7322-1F2D-7EED08C9F81C}"/>
+                  </a:ext>
+                </a:extLst>
+              </p:cNvPr>
+              <p:cNvSpPr/>
+              <p:nvPr/>
+            </p:nvSpPr>
+            <p:spPr>
+              <a:xfrm>
+                <a:off x="8922590" y="2336595"/>
+                <a:ext cx="1540509" cy="1471747"/>
+              </a:xfrm>
+              <a:prstGeom prst="roundRect">
+                <a:avLst>
+                  <a:gd name="adj" fmla="val 9259"/>
+                </a:avLst>
+              </a:prstGeom>
+              <a:solidFill>
+                <a:schemeClr val="bg1"/>
+              </a:solidFill>
+              <a:ln w="19050">
+                <a:solidFill>
+                  <a:schemeClr val="bg2">
+                    <a:lumMod val="25000"/>
+                  </a:schemeClr>
+                </a:solidFill>
+                <a:prstDash val="solid"/>
+              </a:ln>
+            </p:spPr>
+            <p:txBody>
+              <a:bodyPr/>
+              <a:lstStyle/>
+              <a:p>
+                <a:endParaRPr lang="es-ES" dirty="0"/>
+              </a:p>
+            </p:txBody>
+          </p:sp>
+          <p:sp>
+            <p:nvSpPr>
+              <p:cNvPr id="65" name="Text 18">
+                <a:extLst>
+                  <a:ext uri="{FF2B5EF4-FFF2-40B4-BE49-F238E27FC236}">
+                    <a16:creationId xmlns:a16="http://schemas.microsoft.com/office/drawing/2014/main" id="{D53B39BB-3211-B79E-F42B-995DF28B5BAF}"/>
+                  </a:ext>
+                </a:extLst>
+              </p:cNvPr>
+              <p:cNvSpPr/>
+              <p:nvPr/>
+            </p:nvSpPr>
+            <p:spPr>
+              <a:xfrm>
+                <a:off x="9196911" y="2336596"/>
+                <a:ext cx="1365248" cy="543154"/>
+              </a:xfrm>
+              <a:prstGeom prst="rect">
+                <a:avLst/>
+              </a:prstGeom>
+              <a:noFill/>
+              <a:ln/>
+            </p:spPr>
+            <p:txBody>
+              <a:bodyPr wrap="square" lIns="25400" tIns="25400" rIns="25400" bIns="25400" rtlCol="0" anchor="ctr"/>
+              <a:lstStyle/>
+              <a:p>
+                <a:pPr marL="0" indent="0" algn="ctr">
+                  <a:buNone/>
+                </a:pPr>
+                <a:r>
+                  <a:rPr lang="en-US" sz="1200" b="1" dirty="0">
+                    <a:solidFill>
+                      <a:srgbClr val="212121"/>
+                    </a:solidFill>
+                    <a:latin typeface="Calibri" pitchFamily="34" charset="0"/>
+                    <a:ea typeface="Calibri" pitchFamily="34" charset="-122"/>
+                    <a:cs typeface="Calibri" pitchFamily="34" charset="-120"/>
+                  </a:rPr>
+                  <a:t>stop_times.txt</a:t>
+                </a:r>
+                <a:endParaRPr lang="en-US" sz="1200" dirty="0"/>
+              </a:p>
+            </p:txBody>
+          </p:sp>
+          <p:pic>
+            <p:nvPicPr>
+              <p:cNvPr id="66" name="Gráfico 65">
+                <a:extLst>
+                  <a:ext uri="{FF2B5EF4-FFF2-40B4-BE49-F238E27FC236}">
+                    <a16:creationId xmlns:a16="http://schemas.microsoft.com/office/drawing/2014/main" id="{7C0622AC-62C9-AC08-34DA-FAEA1DC5D786}"/>
+                  </a:ext>
+                </a:extLst>
+              </p:cNvPr>
+              <p:cNvPicPr>
+                <a:picLocks noChangeAspect="1"/>
+              </p:cNvPicPr>
+              <p:nvPr/>
+            </p:nvPicPr>
+            <p:blipFill>
+              <a:blip>
+                <a:extLst>
+                  <a:ext uri="{96DAC541-7B7A-43D3-8B79-37D633B846F1}">
+                    <asvg:svgBlip xmlns:asvg="http://schemas.microsoft.com/office/drawing/2016/SVG/main" r:embed="rId4"/>
+                  </a:ext>
+                </a:extLst>
+              </a:blip>
+              <a:stretch>
+                <a:fillRect/>
+              </a:stretch>
+            </p:blipFill>
+            <p:spPr>
+              <a:xfrm>
+                <a:off x="8972660" y="2422268"/>
+                <a:ext cx="389339" cy="389339"/>
+              </a:xfrm>
+              <a:prstGeom prst="rect">
+                <a:avLst/>
+              </a:prstGeom>
+            </p:spPr>
+          </p:pic>
+        </p:grpSp>
+        <p:sp>
+          <p:nvSpPr>
+            <p:cNvPr id="63" name="Text 18">
+              <a:extLst>
+                <a:ext uri="{FF2B5EF4-FFF2-40B4-BE49-F238E27FC236}">
+                  <a16:creationId xmlns:a16="http://schemas.microsoft.com/office/drawing/2014/main" id="{DAD75940-6084-3F0E-CEC3-5D471B1B1090}"/>
+                </a:ext>
+              </a:extLst>
+            </p:cNvPr>
+            <p:cNvSpPr/>
+            <p:nvPr/>
+          </p:nvSpPr>
+          <p:spPr>
+            <a:xfrm>
+              <a:off x="1280160" y="2177185"/>
+              <a:ext cx="1341120" cy="1006826"/>
+            </a:xfrm>
+            <a:prstGeom prst="rect">
+              <a:avLst/>
+            </a:prstGeom>
+            <a:noFill/>
+            <a:ln/>
+          </p:spPr>
+          <p:txBody>
+            <a:bodyPr wrap="square" lIns="25400" tIns="25400" rIns="25400" bIns="25400" rtlCol="0" anchor="ctr"/>
+            <a:lstStyle/>
+            <a:p>
+              <a:pPr marL="171450" indent="-171450">
+                <a:buFontTx/>
+                <a:buChar char="-"/>
+              </a:pPr>
+              <a:r>
+                <a:rPr lang="en-US" sz="1100" b="1" dirty="0" err="1">
+                  <a:solidFill>
+                    <a:srgbClr val="212121"/>
+                  </a:solidFill>
+                  <a:latin typeface="Consolas" panose="020B0609020204030204" pitchFamily="49" charset="0"/>
+                  <a:ea typeface="Calibri" pitchFamily="34" charset="-122"/>
+                  <a:cs typeface="Calibri" pitchFamily="34" charset="-120"/>
+                </a:rPr>
+                <a:t>trip_id</a:t>
+              </a:r>
+              <a:endParaRPr lang="en-US" sz="1100" b="1" dirty="0">
+                <a:solidFill>
+                  <a:srgbClr val="212121"/>
+                </a:solidFill>
+                <a:latin typeface="Consolas" panose="020B0609020204030204" pitchFamily="49" charset="0"/>
+                <a:ea typeface="Calibri" pitchFamily="34" charset="-122"/>
+                <a:cs typeface="Calibri" pitchFamily="34" charset="-120"/>
+              </a:endParaRPr>
+            </a:p>
+            <a:p>
+              <a:pPr marL="171450" indent="-171450">
+                <a:buFontTx/>
+                <a:buChar char="-"/>
+              </a:pPr>
+              <a:r>
+                <a:rPr lang="en-US" sz="1100" b="1" dirty="0" err="1">
+                  <a:solidFill>
+                    <a:srgbClr val="212121"/>
+                  </a:solidFill>
+                  <a:latin typeface="Consolas" panose="020B0609020204030204" pitchFamily="49" charset="0"/>
+                  <a:ea typeface="Calibri" pitchFamily="34" charset="-122"/>
+                  <a:cs typeface="Calibri" pitchFamily="34" charset="-120"/>
+                </a:rPr>
+                <a:t>stop_id</a:t>
+              </a:r>
+              <a:endParaRPr lang="en-US" sz="1100" b="1" dirty="0">
+                <a:solidFill>
+                  <a:srgbClr val="212121"/>
+                </a:solidFill>
+                <a:latin typeface="Consolas" panose="020B0609020204030204" pitchFamily="49" charset="0"/>
+                <a:ea typeface="Calibri" pitchFamily="34" charset="-122"/>
+                <a:cs typeface="Calibri" pitchFamily="34" charset="-120"/>
+              </a:endParaRPr>
+            </a:p>
+            <a:p>
+              <a:pPr marL="171450" indent="-171450">
+                <a:buFontTx/>
+                <a:buChar char="-"/>
+              </a:pPr>
+              <a:r>
+                <a:rPr lang="en-US" sz="1100" dirty="0" err="1">
+                  <a:solidFill>
+                    <a:srgbClr val="212121"/>
+                  </a:solidFill>
+                  <a:latin typeface="Consolas" panose="020B0609020204030204" pitchFamily="49" charset="0"/>
+                  <a:ea typeface="Calibri" pitchFamily="34" charset="-122"/>
+                  <a:cs typeface="Calibri" pitchFamily="34" charset="-120"/>
+                </a:rPr>
+                <a:t>arrival_time</a:t>
+              </a:r>
+              <a:endParaRPr lang="en-US" sz="1100" dirty="0">
+                <a:solidFill>
+                  <a:srgbClr val="212121"/>
+                </a:solidFill>
+                <a:latin typeface="Consolas" panose="020B0609020204030204" pitchFamily="49" charset="0"/>
+                <a:ea typeface="Calibri" pitchFamily="34" charset="-122"/>
+                <a:cs typeface="Calibri" pitchFamily="34" charset="-120"/>
+              </a:endParaRPr>
+            </a:p>
+            <a:p>
+              <a:pPr marL="171450" indent="-171450">
+                <a:buFontTx/>
+                <a:buChar char="-"/>
+              </a:pPr>
+              <a:r>
+                <a:rPr lang="en-US" sz="1100" dirty="0" err="1">
+                  <a:latin typeface="Consolas" panose="020B0609020204030204" pitchFamily="49" charset="0"/>
+                </a:rPr>
+                <a:t>departure_time</a:t>
+              </a:r>
+              <a:endParaRPr lang="en-US" sz="1100" dirty="0">
+                <a:latin typeface="Consolas" panose="020B0609020204030204" pitchFamily="49" charset="0"/>
+              </a:endParaRPr>
+            </a:p>
+            <a:p>
+              <a:pPr marL="171450" indent="-171450">
+                <a:buFontTx/>
+                <a:buChar char="-"/>
+              </a:pPr>
+              <a:r>
+                <a:rPr lang="en-US" sz="1100" dirty="0" err="1">
+                  <a:latin typeface="Consolas" panose="020B0609020204030204" pitchFamily="49" charset="0"/>
+                </a:rPr>
+                <a:t>stop_sequence</a:t>
+              </a:r>
+              <a:endParaRPr lang="en-US" sz="1100" dirty="0">
+                <a:latin typeface="Consolas" panose="020B0609020204030204" pitchFamily="49" charset="0"/>
+              </a:endParaRPr>
+            </a:p>
+          </p:txBody>
+        </p:sp>
+      </p:grpSp>
+      <p:grpSp>
+        <p:nvGrpSpPr>
+          <p:cNvPr id="67" name="Grupo 66">
+            <a:extLst>
+              <a:ext uri="{FF2B5EF4-FFF2-40B4-BE49-F238E27FC236}">
+                <a16:creationId xmlns:a16="http://schemas.microsoft.com/office/drawing/2014/main" id="{76AD4AF7-9A9B-8242-9959-739F2C13D89D}"/>
+              </a:ext>
+            </a:extLst>
+          </p:cNvPr>
+          <p:cNvGrpSpPr/>
+          <p:nvPr/>
+        </p:nvGrpSpPr>
+        <p:grpSpPr>
+          <a:xfrm>
+            <a:off x="6562206" y="2173254"/>
+            <a:ext cx="1269773" cy="1398708"/>
+            <a:chOff x="1080771" y="1712264"/>
+            <a:chExt cx="1277393" cy="1272173"/>
+          </a:xfrm>
+        </p:grpSpPr>
+        <p:grpSp>
+          <p:nvGrpSpPr>
+            <p:cNvPr id="68" name="Grupo 67">
+              <a:extLst>
+                <a:ext uri="{FF2B5EF4-FFF2-40B4-BE49-F238E27FC236}">
+                  <a16:creationId xmlns:a16="http://schemas.microsoft.com/office/drawing/2014/main" id="{6F84B856-F33A-7B1C-5C5A-4C58F1C8ABE5}"/>
+                </a:ext>
+              </a:extLst>
+            </p:cNvPr>
+            <p:cNvGrpSpPr/>
+            <p:nvPr/>
+          </p:nvGrpSpPr>
+          <p:grpSpPr>
+            <a:xfrm>
+              <a:off x="1080771" y="1712264"/>
+              <a:ext cx="1269773" cy="1272173"/>
+              <a:chOff x="8922590" y="2336595"/>
+              <a:chExt cx="1269773" cy="1272173"/>
+            </a:xfrm>
+          </p:grpSpPr>
+          <p:sp>
+            <p:nvSpPr>
+              <p:cNvPr id="70" name="Shape 17">
+                <a:extLst>
+                  <a:ext uri="{FF2B5EF4-FFF2-40B4-BE49-F238E27FC236}">
+                    <a16:creationId xmlns:a16="http://schemas.microsoft.com/office/drawing/2014/main" id="{F16B005D-64A9-5508-ED77-1CB5C4BAB7D8}"/>
+                  </a:ext>
+                </a:extLst>
+              </p:cNvPr>
+              <p:cNvSpPr/>
+              <p:nvPr/>
+            </p:nvSpPr>
+            <p:spPr>
+              <a:xfrm>
+                <a:off x="8922590" y="2336595"/>
+                <a:ext cx="1269773" cy="1272173"/>
+              </a:xfrm>
+              <a:prstGeom prst="roundRect">
+                <a:avLst>
+                  <a:gd name="adj" fmla="val 9259"/>
+                </a:avLst>
+              </a:prstGeom>
+              <a:solidFill>
+                <a:schemeClr val="bg1"/>
+              </a:solidFill>
+              <a:ln w="19050">
+                <a:solidFill>
+                  <a:schemeClr val="bg2">
+                    <a:lumMod val="25000"/>
+                  </a:schemeClr>
+                </a:solidFill>
+                <a:prstDash val="solid"/>
+              </a:ln>
+            </p:spPr>
+            <p:txBody>
+              <a:bodyPr/>
+              <a:lstStyle/>
+              <a:p>
+                <a:endParaRPr lang="es-ES" dirty="0"/>
+              </a:p>
+            </p:txBody>
+          </p:sp>
+          <p:sp>
+            <p:nvSpPr>
+              <p:cNvPr id="71" name="Text 18">
+                <a:extLst>
+                  <a:ext uri="{FF2B5EF4-FFF2-40B4-BE49-F238E27FC236}">
+                    <a16:creationId xmlns:a16="http://schemas.microsoft.com/office/drawing/2014/main" id="{7CD340AE-0AC0-FB91-BD9A-54E8DE8643BD}"/>
+                  </a:ext>
+                </a:extLst>
+              </p:cNvPr>
+              <p:cNvSpPr/>
+              <p:nvPr/>
+            </p:nvSpPr>
+            <p:spPr>
+              <a:xfrm>
+                <a:off x="9196911" y="2336596"/>
+                <a:ext cx="938528" cy="543154"/>
+              </a:xfrm>
+              <a:prstGeom prst="rect">
+                <a:avLst/>
+              </a:prstGeom>
+              <a:noFill/>
+              <a:ln/>
+            </p:spPr>
+            <p:txBody>
+              <a:bodyPr wrap="square" lIns="25400" tIns="25400" rIns="25400" bIns="25400" rtlCol="0" anchor="ctr"/>
+              <a:lstStyle/>
+              <a:p>
+                <a:pPr marL="0" indent="0" algn="ctr">
+                  <a:buNone/>
+                </a:pPr>
+                <a:r>
+                  <a:rPr lang="en-US" sz="1200" b="1" dirty="0">
+                    <a:solidFill>
+                      <a:srgbClr val="212121"/>
+                    </a:solidFill>
+                    <a:latin typeface="Calibri" pitchFamily="34" charset="0"/>
+                    <a:ea typeface="Calibri" pitchFamily="34" charset="-122"/>
+                    <a:cs typeface="Calibri" pitchFamily="34" charset="-120"/>
+                  </a:rPr>
+                  <a:t>trips.txt</a:t>
+                </a:r>
+                <a:endParaRPr lang="en-US" sz="1200" dirty="0"/>
+              </a:p>
+            </p:txBody>
+          </p:sp>
+          <p:pic>
+            <p:nvPicPr>
+              <p:cNvPr id="72" name="Gráfico 71">
+                <a:extLst>
+                  <a:ext uri="{FF2B5EF4-FFF2-40B4-BE49-F238E27FC236}">
+                    <a16:creationId xmlns:a16="http://schemas.microsoft.com/office/drawing/2014/main" id="{EF7C9D01-0935-2A47-A68E-E9DA26B61142}"/>
+                  </a:ext>
+                </a:extLst>
+              </p:cNvPr>
+              <p:cNvPicPr>
+                <a:picLocks noChangeAspect="1"/>
+              </p:cNvPicPr>
+              <p:nvPr/>
+            </p:nvPicPr>
+            <p:blipFill>
+              <a:blip>
+                <a:extLst>
+                  <a:ext uri="{96DAC541-7B7A-43D3-8B79-37D633B846F1}">
+                    <asvg:svgBlip xmlns:asvg="http://schemas.microsoft.com/office/drawing/2016/SVG/main" r:embed="rId4"/>
+                  </a:ext>
+                </a:extLst>
+              </a:blip>
+              <a:stretch>
+                <a:fillRect/>
+              </a:stretch>
+            </p:blipFill>
+            <p:spPr>
+              <a:xfrm>
+                <a:off x="8972660" y="2422268"/>
+                <a:ext cx="389339" cy="389339"/>
+              </a:xfrm>
+              <a:prstGeom prst="rect">
+                <a:avLst/>
+              </a:prstGeom>
+            </p:spPr>
+          </p:pic>
+        </p:grpSp>
+        <p:sp>
+          <p:nvSpPr>
+            <p:cNvPr id="69" name="Text 18">
+              <a:extLst>
+                <a:ext uri="{FF2B5EF4-FFF2-40B4-BE49-F238E27FC236}">
+                  <a16:creationId xmlns:a16="http://schemas.microsoft.com/office/drawing/2014/main" id="{79BD01D6-3AAE-6198-0E99-3D9680C5BE11}"/>
+                </a:ext>
+              </a:extLst>
+            </p:cNvPr>
+            <p:cNvSpPr/>
+            <p:nvPr/>
+          </p:nvSpPr>
+          <p:spPr>
+            <a:xfrm>
+              <a:off x="1280160" y="2110415"/>
+              <a:ext cx="1078004" cy="874022"/>
+            </a:xfrm>
+            <a:prstGeom prst="rect">
+              <a:avLst/>
+            </a:prstGeom>
+            <a:noFill/>
+            <a:ln/>
+          </p:spPr>
+          <p:txBody>
+            <a:bodyPr wrap="square" lIns="25400" tIns="25400" rIns="25400" bIns="25400" rtlCol="0" anchor="ctr"/>
+            <a:lstStyle/>
+            <a:p>
+              <a:pPr marL="171450" indent="-171450">
+                <a:buFontTx/>
+                <a:buChar char="-"/>
+              </a:pPr>
+              <a:r>
+                <a:rPr lang="en-US" sz="1100" b="1" dirty="0" err="1">
+                  <a:solidFill>
+                    <a:srgbClr val="212121"/>
+                  </a:solidFill>
+                  <a:latin typeface="Consolas" panose="020B0609020204030204" pitchFamily="49" charset="0"/>
+                  <a:ea typeface="Calibri" pitchFamily="34" charset="-122"/>
+                  <a:cs typeface="Calibri" pitchFamily="34" charset="-120"/>
+                </a:rPr>
+                <a:t>trip_id</a:t>
+              </a:r>
+              <a:endParaRPr lang="en-US" sz="1100" b="1" dirty="0">
+                <a:solidFill>
+                  <a:srgbClr val="212121"/>
+                </a:solidFill>
+                <a:latin typeface="Consolas" panose="020B0609020204030204" pitchFamily="49" charset="0"/>
+                <a:ea typeface="Calibri" pitchFamily="34" charset="-122"/>
+                <a:cs typeface="Calibri" pitchFamily="34" charset="-120"/>
+              </a:endParaRPr>
+            </a:p>
+            <a:p>
+              <a:pPr marL="171450" indent="-171450">
+                <a:buFontTx/>
+                <a:buChar char="-"/>
+              </a:pPr>
+              <a:r>
+                <a:rPr lang="en-US" sz="1100" b="1" dirty="0" err="1">
+                  <a:solidFill>
+                    <a:srgbClr val="212121"/>
+                  </a:solidFill>
+                  <a:latin typeface="Consolas" panose="020B0609020204030204" pitchFamily="49" charset="0"/>
+                  <a:ea typeface="Calibri" pitchFamily="34" charset="-122"/>
+                  <a:cs typeface="Calibri" pitchFamily="34" charset="-120"/>
+                </a:rPr>
+                <a:t>route_id</a:t>
+              </a:r>
+              <a:endParaRPr lang="en-US" sz="1100" b="1" dirty="0">
+                <a:solidFill>
+                  <a:srgbClr val="212121"/>
+                </a:solidFill>
+                <a:latin typeface="Consolas" panose="020B0609020204030204" pitchFamily="49" charset="0"/>
+                <a:ea typeface="Calibri" pitchFamily="34" charset="-122"/>
+                <a:cs typeface="Calibri" pitchFamily="34" charset="-120"/>
+              </a:endParaRPr>
+            </a:p>
+            <a:p>
+              <a:pPr marL="171450" indent="-171450">
+                <a:buFontTx/>
+                <a:buChar char="-"/>
+              </a:pPr>
+              <a:r>
+                <a:rPr lang="en-US" sz="1100" b="1" dirty="0" err="1">
+                  <a:solidFill>
+                    <a:srgbClr val="212121"/>
+                  </a:solidFill>
+                  <a:latin typeface="Consolas" panose="020B0609020204030204" pitchFamily="49" charset="0"/>
+                  <a:ea typeface="Calibri" pitchFamily="34" charset="-122"/>
+                  <a:cs typeface="Calibri" pitchFamily="34" charset="-120"/>
+                </a:rPr>
+                <a:t>service_id</a:t>
+              </a:r>
+              <a:endParaRPr lang="en-US" sz="1100" dirty="0">
+                <a:solidFill>
+                  <a:srgbClr val="212121"/>
+                </a:solidFill>
+                <a:latin typeface="Consolas" panose="020B0609020204030204" pitchFamily="49" charset="0"/>
+                <a:ea typeface="Calibri" pitchFamily="34" charset="-122"/>
+                <a:cs typeface="Calibri" pitchFamily="34" charset="-120"/>
+              </a:endParaRPr>
+            </a:p>
+            <a:p>
+              <a:pPr marL="171450" indent="-171450">
+                <a:buFontTx/>
+                <a:buChar char="-"/>
+              </a:pPr>
+              <a:r>
+                <a:rPr lang="en-US" sz="1100" dirty="0" err="1">
+                  <a:solidFill>
+                    <a:srgbClr val="212121"/>
+                  </a:solidFill>
+                  <a:latin typeface="Consolas" panose="020B0609020204030204" pitchFamily="49" charset="0"/>
+                  <a:ea typeface="Calibri" pitchFamily="34" charset="-122"/>
+                  <a:cs typeface="Calibri" pitchFamily="34" charset="-120"/>
+                </a:rPr>
+                <a:t>shape_id</a:t>
+              </a:r>
+              <a:endParaRPr lang="en-US" sz="1100" dirty="0">
+                <a:latin typeface="Consolas" panose="020B0609020204030204" pitchFamily="49" charset="0"/>
+              </a:endParaRPr>
+            </a:p>
+          </p:txBody>
+        </p:sp>
+      </p:grpSp>
+      <p:grpSp>
+        <p:nvGrpSpPr>
+          <p:cNvPr id="73" name="Grupo 72">
+            <a:extLst>
+              <a:ext uri="{FF2B5EF4-FFF2-40B4-BE49-F238E27FC236}">
+                <a16:creationId xmlns:a16="http://schemas.microsoft.com/office/drawing/2014/main" id="{5B7871F4-4674-ED32-E625-17112BE1490C}"/>
+              </a:ext>
+            </a:extLst>
+          </p:cNvPr>
+          <p:cNvGrpSpPr/>
+          <p:nvPr/>
+        </p:nvGrpSpPr>
+        <p:grpSpPr>
+          <a:xfrm>
+            <a:off x="8947351" y="2225939"/>
+            <a:ext cx="1735832" cy="1291784"/>
+            <a:chOff x="1080771" y="1712265"/>
+            <a:chExt cx="1746249" cy="1174922"/>
+          </a:xfrm>
+        </p:grpSpPr>
+        <p:grpSp>
+          <p:nvGrpSpPr>
+            <p:cNvPr id="74" name="Grupo 73">
+              <a:extLst>
+                <a:ext uri="{FF2B5EF4-FFF2-40B4-BE49-F238E27FC236}">
+                  <a16:creationId xmlns:a16="http://schemas.microsoft.com/office/drawing/2014/main" id="{C21A2E47-7098-F962-DD6A-D5EEB476AADC}"/>
+                </a:ext>
+              </a:extLst>
+            </p:cNvPr>
+            <p:cNvGrpSpPr/>
+            <p:nvPr/>
+          </p:nvGrpSpPr>
+          <p:grpSpPr>
+            <a:xfrm>
+              <a:off x="1080771" y="1712265"/>
+              <a:ext cx="1746249" cy="1174922"/>
+              <a:chOff x="8922590" y="2336596"/>
+              <a:chExt cx="1746249" cy="1174922"/>
+            </a:xfrm>
+          </p:grpSpPr>
+          <p:sp>
+            <p:nvSpPr>
+              <p:cNvPr id="76" name="Shape 17">
+                <a:extLst>
+                  <a:ext uri="{FF2B5EF4-FFF2-40B4-BE49-F238E27FC236}">
+                    <a16:creationId xmlns:a16="http://schemas.microsoft.com/office/drawing/2014/main" id="{1F07B980-640F-257E-A804-6C13EC310DE5}"/>
+                  </a:ext>
+                </a:extLst>
+              </p:cNvPr>
+              <p:cNvSpPr/>
+              <p:nvPr/>
+            </p:nvSpPr>
+            <p:spPr>
+              <a:xfrm>
+                <a:off x="8922590" y="2336596"/>
+                <a:ext cx="1746249" cy="1174922"/>
+              </a:xfrm>
+              <a:prstGeom prst="roundRect">
+                <a:avLst>
+                  <a:gd name="adj" fmla="val 9259"/>
+                </a:avLst>
+              </a:prstGeom>
+              <a:solidFill>
+                <a:schemeClr val="bg1"/>
+              </a:solidFill>
+              <a:ln w="19050">
+                <a:solidFill>
+                  <a:schemeClr val="bg2">
+                    <a:lumMod val="25000"/>
+                  </a:schemeClr>
+                </a:solidFill>
+                <a:prstDash val="solid"/>
+              </a:ln>
+            </p:spPr>
+            <p:txBody>
+              <a:bodyPr/>
+              <a:lstStyle/>
+              <a:p>
+                <a:endParaRPr lang="es-ES" dirty="0"/>
+              </a:p>
+            </p:txBody>
+          </p:sp>
+          <p:sp>
+            <p:nvSpPr>
+              <p:cNvPr id="77" name="Text 18">
+                <a:extLst>
+                  <a:ext uri="{FF2B5EF4-FFF2-40B4-BE49-F238E27FC236}">
+                    <a16:creationId xmlns:a16="http://schemas.microsoft.com/office/drawing/2014/main" id="{361C130A-7C8A-5594-8F87-1F8F18E43157}"/>
+                  </a:ext>
+                </a:extLst>
+              </p:cNvPr>
+              <p:cNvSpPr/>
+              <p:nvPr/>
+            </p:nvSpPr>
+            <p:spPr>
+              <a:xfrm>
+                <a:off x="9196911" y="2336596"/>
+                <a:ext cx="1042590" cy="543154"/>
+              </a:xfrm>
+              <a:prstGeom prst="rect">
+                <a:avLst/>
+              </a:prstGeom>
+              <a:noFill/>
+              <a:ln/>
+            </p:spPr>
+            <p:txBody>
+              <a:bodyPr wrap="square" lIns="25400" tIns="25400" rIns="25400" bIns="25400" rtlCol="0" anchor="ctr"/>
+              <a:lstStyle/>
+              <a:p>
+                <a:pPr marL="0" indent="0" algn="ctr">
+                  <a:buNone/>
+                </a:pPr>
+                <a:r>
+                  <a:rPr lang="en-US" sz="1200" b="1" dirty="0">
+                    <a:solidFill>
+                      <a:srgbClr val="212121"/>
+                    </a:solidFill>
+                    <a:latin typeface="Calibri" pitchFamily="34" charset="0"/>
+                    <a:ea typeface="Calibri" pitchFamily="34" charset="-122"/>
+                    <a:cs typeface="Calibri" pitchFamily="34" charset="-120"/>
+                  </a:rPr>
+                  <a:t>routes.txt</a:t>
+                </a:r>
+                <a:endParaRPr lang="en-US" sz="1200" dirty="0"/>
+              </a:p>
+            </p:txBody>
+          </p:sp>
+          <p:pic>
+            <p:nvPicPr>
+              <p:cNvPr id="78" name="Gráfico 77">
+                <a:extLst>
+                  <a:ext uri="{FF2B5EF4-FFF2-40B4-BE49-F238E27FC236}">
+                    <a16:creationId xmlns:a16="http://schemas.microsoft.com/office/drawing/2014/main" id="{FC1D43D5-62D1-D5B6-41FA-332396E86585}"/>
+                  </a:ext>
+                </a:extLst>
+              </p:cNvPr>
+              <p:cNvPicPr>
+                <a:picLocks noChangeAspect="1"/>
+              </p:cNvPicPr>
+              <p:nvPr/>
+            </p:nvPicPr>
+            <p:blipFill>
+              <a:blip>
+                <a:extLst>
+                  <a:ext uri="{96DAC541-7B7A-43D3-8B79-37D633B846F1}">
+                    <asvg:svgBlip xmlns:asvg="http://schemas.microsoft.com/office/drawing/2016/SVG/main" r:embed="rId4"/>
+                  </a:ext>
+                </a:extLst>
+              </a:blip>
+              <a:stretch>
+                <a:fillRect/>
+              </a:stretch>
+            </p:blipFill>
+            <p:spPr>
+              <a:xfrm>
+                <a:off x="8972660" y="2422268"/>
+                <a:ext cx="389339" cy="389339"/>
+              </a:xfrm>
+              <a:prstGeom prst="rect">
+                <a:avLst/>
+              </a:prstGeom>
+            </p:spPr>
+          </p:pic>
+        </p:grpSp>
+        <p:sp>
+          <p:nvSpPr>
+            <p:cNvPr id="75" name="Text 18">
+              <a:extLst>
+                <a:ext uri="{FF2B5EF4-FFF2-40B4-BE49-F238E27FC236}">
+                  <a16:creationId xmlns:a16="http://schemas.microsoft.com/office/drawing/2014/main" id="{110C97F8-497C-DF31-C745-BBCAF1E00E06}"/>
+                </a:ext>
+              </a:extLst>
+            </p:cNvPr>
+            <p:cNvSpPr/>
+            <p:nvPr/>
+          </p:nvSpPr>
+          <p:spPr>
+            <a:xfrm>
+              <a:off x="1287780" y="2177185"/>
+              <a:ext cx="1539240" cy="649041"/>
+            </a:xfrm>
+            <a:prstGeom prst="rect">
+              <a:avLst/>
+            </a:prstGeom>
+            <a:noFill/>
+            <a:ln/>
+          </p:spPr>
+          <p:txBody>
+            <a:bodyPr wrap="square" lIns="25400" tIns="25400" rIns="25400" bIns="25400" rtlCol="0" anchor="ctr"/>
+            <a:lstStyle/>
+            <a:p>
+              <a:pPr marL="171450" indent="-171450">
+                <a:buFontTx/>
+                <a:buChar char="-"/>
+              </a:pPr>
+              <a:r>
+                <a:rPr lang="en-US" sz="1100" b="1" dirty="0" err="1">
+                  <a:solidFill>
+                    <a:srgbClr val="212121"/>
+                  </a:solidFill>
+                  <a:latin typeface="Consolas" panose="020B0609020204030204" pitchFamily="49" charset="0"/>
+                  <a:ea typeface="Calibri" pitchFamily="34" charset="-122"/>
+                  <a:cs typeface="Calibri" pitchFamily="34" charset="-120"/>
+                </a:rPr>
+                <a:t>route_id</a:t>
+              </a:r>
+              <a:endParaRPr lang="en-US" sz="1100" b="1" dirty="0">
+                <a:solidFill>
+                  <a:srgbClr val="212121"/>
+                </a:solidFill>
+                <a:latin typeface="Consolas" panose="020B0609020204030204" pitchFamily="49" charset="0"/>
+                <a:ea typeface="Calibri" pitchFamily="34" charset="-122"/>
+                <a:cs typeface="Calibri" pitchFamily="34" charset="-120"/>
+              </a:endParaRPr>
+            </a:p>
+            <a:p>
+              <a:pPr marL="171450" indent="-171450">
+                <a:buFontTx/>
+                <a:buChar char="-"/>
+              </a:pPr>
+              <a:r>
+                <a:rPr lang="en-US" sz="1100" dirty="0" err="1">
+                  <a:solidFill>
+                    <a:srgbClr val="212121"/>
+                  </a:solidFill>
+                  <a:latin typeface="Consolas" panose="020B0609020204030204" pitchFamily="49" charset="0"/>
+                  <a:ea typeface="Calibri" pitchFamily="34" charset="-122"/>
+                  <a:cs typeface="Calibri" pitchFamily="34" charset="-120"/>
+                </a:rPr>
+                <a:t>route_short_name</a:t>
+              </a:r>
+              <a:endParaRPr lang="en-US" sz="1100" dirty="0">
+                <a:solidFill>
+                  <a:srgbClr val="212121"/>
+                </a:solidFill>
+                <a:latin typeface="Consolas" panose="020B0609020204030204" pitchFamily="49" charset="0"/>
+                <a:ea typeface="Calibri" pitchFamily="34" charset="-122"/>
+                <a:cs typeface="Calibri" pitchFamily="34" charset="-120"/>
+              </a:endParaRPr>
+            </a:p>
+            <a:p>
+              <a:pPr marL="171450" indent="-171450">
+                <a:buFontTx/>
+                <a:buChar char="-"/>
+              </a:pPr>
+              <a:r>
+                <a:rPr lang="en-US" sz="1100" dirty="0" err="1">
+                  <a:latin typeface="Consolas" panose="020B0609020204030204" pitchFamily="49" charset="0"/>
+                </a:rPr>
+                <a:t>route_color</a:t>
+              </a:r>
+              <a:endParaRPr lang="en-US" sz="1100" dirty="0">
+                <a:latin typeface="Consolas" panose="020B0609020204030204" pitchFamily="49" charset="0"/>
+              </a:endParaRPr>
+            </a:p>
+          </p:txBody>
+        </p:sp>
+      </p:grpSp>
+      <p:grpSp>
+        <p:nvGrpSpPr>
+          <p:cNvPr id="79" name="Grupo 78">
+            <a:extLst>
+              <a:ext uri="{FF2B5EF4-FFF2-40B4-BE49-F238E27FC236}">
+                <a16:creationId xmlns:a16="http://schemas.microsoft.com/office/drawing/2014/main" id="{472391A5-CB22-7A68-80BC-A92FE0B8D222}"/>
+              </a:ext>
+            </a:extLst>
+          </p:cNvPr>
+          <p:cNvGrpSpPr/>
+          <p:nvPr/>
+        </p:nvGrpSpPr>
+        <p:grpSpPr>
+          <a:xfrm>
+            <a:off x="6326764" y="4418512"/>
+            <a:ext cx="1735832" cy="1291784"/>
+            <a:chOff x="1080771" y="1712265"/>
+            <a:chExt cx="1746249" cy="1174922"/>
+          </a:xfrm>
+        </p:grpSpPr>
+        <p:grpSp>
+          <p:nvGrpSpPr>
+            <p:cNvPr id="80" name="Grupo 79">
+              <a:extLst>
+                <a:ext uri="{FF2B5EF4-FFF2-40B4-BE49-F238E27FC236}">
+                  <a16:creationId xmlns:a16="http://schemas.microsoft.com/office/drawing/2014/main" id="{B2C99F77-8478-46CC-B386-B6DC9B03A4B2}"/>
+                </a:ext>
+              </a:extLst>
+            </p:cNvPr>
+            <p:cNvGrpSpPr/>
+            <p:nvPr/>
+          </p:nvGrpSpPr>
+          <p:grpSpPr>
+            <a:xfrm>
+              <a:off x="1080771" y="1712265"/>
+              <a:ext cx="1746249" cy="1174922"/>
+              <a:chOff x="8922590" y="2336596"/>
+              <a:chExt cx="1746249" cy="1174922"/>
+            </a:xfrm>
+          </p:grpSpPr>
+          <p:sp>
+            <p:nvSpPr>
+              <p:cNvPr id="82" name="Shape 17">
+                <a:extLst>
+                  <a:ext uri="{FF2B5EF4-FFF2-40B4-BE49-F238E27FC236}">
+                    <a16:creationId xmlns:a16="http://schemas.microsoft.com/office/drawing/2014/main" id="{0625CEFC-4848-2966-40CE-4FA721298A66}"/>
+                  </a:ext>
+                </a:extLst>
+              </p:cNvPr>
+              <p:cNvSpPr/>
+              <p:nvPr/>
+            </p:nvSpPr>
+            <p:spPr>
+              <a:xfrm>
+                <a:off x="8922590" y="2336596"/>
+                <a:ext cx="1746249" cy="1174922"/>
+              </a:xfrm>
+              <a:prstGeom prst="roundRect">
+                <a:avLst>
+                  <a:gd name="adj" fmla="val 9259"/>
+                </a:avLst>
+              </a:prstGeom>
+              <a:solidFill>
+                <a:schemeClr val="bg1"/>
+              </a:solidFill>
+              <a:ln w="19050">
+                <a:solidFill>
+                  <a:schemeClr val="bg2">
+                    <a:lumMod val="25000"/>
+                  </a:schemeClr>
+                </a:solidFill>
+                <a:prstDash val="solid"/>
+              </a:ln>
+            </p:spPr>
+            <p:txBody>
+              <a:bodyPr/>
+              <a:lstStyle/>
+              <a:p>
+                <a:endParaRPr lang="es-ES" dirty="0"/>
+              </a:p>
+            </p:txBody>
+          </p:sp>
+          <p:sp>
+            <p:nvSpPr>
+              <p:cNvPr id="83" name="Text 18">
+                <a:extLst>
+                  <a:ext uri="{FF2B5EF4-FFF2-40B4-BE49-F238E27FC236}">
+                    <a16:creationId xmlns:a16="http://schemas.microsoft.com/office/drawing/2014/main" id="{C647A2F4-1D30-858C-EE0E-818825FFEDCD}"/>
+                  </a:ext>
+                </a:extLst>
+              </p:cNvPr>
+              <p:cNvSpPr/>
+              <p:nvPr/>
+            </p:nvSpPr>
+            <p:spPr>
+              <a:xfrm>
+                <a:off x="9196911" y="2336596"/>
+                <a:ext cx="1471928" cy="543154"/>
+              </a:xfrm>
+              <a:prstGeom prst="rect">
+                <a:avLst/>
+              </a:prstGeom>
+              <a:noFill/>
+              <a:ln/>
+            </p:spPr>
+            <p:txBody>
+              <a:bodyPr wrap="square" lIns="25400" tIns="25400" rIns="25400" bIns="25400" rtlCol="0" anchor="ctr"/>
+              <a:lstStyle/>
+              <a:p>
+                <a:pPr marL="0" indent="0" algn="ctr">
+                  <a:buNone/>
+                </a:pPr>
+                <a:r>
+                  <a:rPr lang="en-US" sz="1200" b="1" dirty="0">
+                    <a:solidFill>
+                      <a:srgbClr val="212121"/>
+                    </a:solidFill>
+                    <a:latin typeface="Calibri" pitchFamily="34" charset="0"/>
+                    <a:ea typeface="Calibri" pitchFamily="34" charset="-122"/>
+                    <a:cs typeface="Calibri" pitchFamily="34" charset="-120"/>
+                  </a:rPr>
+                  <a:t>calendar_dates.txt</a:t>
+                </a:r>
+                <a:endParaRPr lang="en-US" sz="1200" dirty="0"/>
+              </a:p>
+            </p:txBody>
+          </p:sp>
+          <p:pic>
+            <p:nvPicPr>
+              <p:cNvPr id="84" name="Gráfico 83">
+                <a:extLst>
+                  <a:ext uri="{FF2B5EF4-FFF2-40B4-BE49-F238E27FC236}">
+                    <a16:creationId xmlns:a16="http://schemas.microsoft.com/office/drawing/2014/main" id="{2EB18204-4421-322B-4311-1E20C44998F5}"/>
+                  </a:ext>
+                </a:extLst>
+              </p:cNvPr>
+              <p:cNvPicPr>
+                <a:picLocks noChangeAspect="1"/>
+              </p:cNvPicPr>
+              <p:nvPr/>
+            </p:nvPicPr>
+            <p:blipFill>
+              <a:blip>
+                <a:extLst>
+                  <a:ext uri="{96DAC541-7B7A-43D3-8B79-37D633B846F1}">
+                    <asvg:svgBlip xmlns:asvg="http://schemas.microsoft.com/office/drawing/2016/SVG/main" r:embed="rId4"/>
+                  </a:ext>
+                </a:extLst>
+              </a:blip>
+              <a:stretch>
+                <a:fillRect/>
+              </a:stretch>
+            </p:blipFill>
+            <p:spPr>
+              <a:xfrm>
+                <a:off x="8972660" y="2422268"/>
+                <a:ext cx="389339" cy="389339"/>
+              </a:xfrm>
+              <a:prstGeom prst="rect">
+                <a:avLst/>
+              </a:prstGeom>
+            </p:spPr>
+          </p:pic>
+        </p:grpSp>
+        <p:sp>
+          <p:nvSpPr>
+            <p:cNvPr id="81" name="Text 18">
+              <a:extLst>
+                <a:ext uri="{FF2B5EF4-FFF2-40B4-BE49-F238E27FC236}">
+                  <a16:creationId xmlns:a16="http://schemas.microsoft.com/office/drawing/2014/main" id="{3EB30F20-ED69-AC1E-F525-0956480DE93E}"/>
+                </a:ext>
+              </a:extLst>
+            </p:cNvPr>
+            <p:cNvSpPr/>
+            <p:nvPr/>
+          </p:nvSpPr>
+          <p:spPr>
+            <a:xfrm>
+              <a:off x="1287780" y="2177185"/>
+              <a:ext cx="1539240" cy="649041"/>
+            </a:xfrm>
+            <a:prstGeom prst="rect">
+              <a:avLst/>
+            </a:prstGeom>
+            <a:noFill/>
+            <a:ln/>
+          </p:spPr>
+          <p:txBody>
+            <a:bodyPr wrap="square" lIns="25400" tIns="25400" rIns="25400" bIns="25400" rtlCol="0" anchor="ctr"/>
+            <a:lstStyle/>
+            <a:p>
+              <a:pPr marL="171450" indent="-171450">
+                <a:buFontTx/>
+                <a:buChar char="-"/>
+              </a:pPr>
+              <a:r>
+                <a:rPr lang="en-US" sz="1100" b="1" dirty="0" err="1">
+                  <a:solidFill>
+                    <a:srgbClr val="212121"/>
+                  </a:solidFill>
+                  <a:latin typeface="Consolas" panose="020B0609020204030204" pitchFamily="49" charset="0"/>
+                  <a:ea typeface="Calibri" pitchFamily="34" charset="-122"/>
+                  <a:cs typeface="Calibri" pitchFamily="34" charset="-120"/>
+                </a:rPr>
+                <a:t>service_id</a:t>
+              </a:r>
+              <a:endParaRPr lang="en-US" sz="1100" b="1" dirty="0">
+                <a:solidFill>
+                  <a:srgbClr val="212121"/>
+                </a:solidFill>
+                <a:latin typeface="Consolas" panose="020B0609020204030204" pitchFamily="49" charset="0"/>
+                <a:ea typeface="Calibri" pitchFamily="34" charset="-122"/>
+                <a:cs typeface="Calibri" pitchFamily="34" charset="-120"/>
+              </a:endParaRPr>
+            </a:p>
+            <a:p>
+              <a:pPr marL="171450" indent="-171450">
+                <a:buFontTx/>
+                <a:buChar char="-"/>
+              </a:pPr>
+              <a:r>
+                <a:rPr lang="en-US" sz="1100" dirty="0">
+                  <a:solidFill>
+                    <a:srgbClr val="212121"/>
+                  </a:solidFill>
+                  <a:latin typeface="Consolas" panose="020B0609020204030204" pitchFamily="49" charset="0"/>
+                  <a:ea typeface="Calibri" pitchFamily="34" charset="-122"/>
+                  <a:cs typeface="Calibri" pitchFamily="34" charset="-120"/>
+                </a:rPr>
+                <a:t>date</a:t>
+              </a:r>
+            </a:p>
+            <a:p>
+              <a:pPr marL="171450" indent="-171450">
+                <a:buFontTx/>
+                <a:buChar char="-"/>
+              </a:pPr>
+              <a:r>
+                <a:rPr lang="en-US" sz="1100" dirty="0" err="1">
+                  <a:latin typeface="Consolas" panose="020B0609020204030204" pitchFamily="49" charset="0"/>
+                </a:rPr>
+                <a:t>exception_type</a:t>
+              </a:r>
+              <a:endParaRPr lang="en-US" sz="1100" dirty="0">
+                <a:latin typeface="Consolas" panose="020B0609020204030204" pitchFamily="49" charset="0"/>
+              </a:endParaRPr>
+            </a:p>
+          </p:txBody>
+        </p:sp>
+      </p:grpSp>
+      <p:grpSp>
+        <p:nvGrpSpPr>
+          <p:cNvPr id="85" name="Grupo 84">
+            <a:extLst>
+              <a:ext uri="{FF2B5EF4-FFF2-40B4-BE49-F238E27FC236}">
+                <a16:creationId xmlns:a16="http://schemas.microsoft.com/office/drawing/2014/main" id="{0C35030C-38C6-91DC-ECC5-2FE720D8FE88}"/>
+              </a:ext>
+            </a:extLst>
+          </p:cNvPr>
+          <p:cNvGrpSpPr/>
+          <p:nvPr/>
+        </p:nvGrpSpPr>
+        <p:grpSpPr>
+          <a:xfrm>
+            <a:off x="521629" y="5537786"/>
+            <a:ext cx="1277393" cy="1008075"/>
+            <a:chOff x="1080771" y="1712264"/>
+            <a:chExt cx="1277393" cy="1008075"/>
+          </a:xfrm>
+        </p:grpSpPr>
+        <p:grpSp>
+          <p:nvGrpSpPr>
+            <p:cNvPr id="86" name="Grupo 85">
+              <a:extLst>
+                <a:ext uri="{FF2B5EF4-FFF2-40B4-BE49-F238E27FC236}">
+                  <a16:creationId xmlns:a16="http://schemas.microsoft.com/office/drawing/2014/main" id="{0B05A662-7E5A-2EF4-C538-CAB19976DB9E}"/>
+                </a:ext>
+              </a:extLst>
+            </p:cNvPr>
+            <p:cNvGrpSpPr/>
+            <p:nvPr/>
+          </p:nvGrpSpPr>
+          <p:grpSpPr>
+            <a:xfrm>
+              <a:off x="1080771" y="1712264"/>
+              <a:ext cx="1269773" cy="1008075"/>
+              <a:chOff x="8922590" y="2336595"/>
+              <a:chExt cx="1269773" cy="1008075"/>
+            </a:xfrm>
+          </p:grpSpPr>
+          <p:sp>
+            <p:nvSpPr>
+              <p:cNvPr id="88" name="Shape 17">
+                <a:extLst>
+                  <a:ext uri="{FF2B5EF4-FFF2-40B4-BE49-F238E27FC236}">
+                    <a16:creationId xmlns:a16="http://schemas.microsoft.com/office/drawing/2014/main" id="{00B0924A-8BF4-C4C7-6A63-97F815E3F1C7}"/>
+                  </a:ext>
+                </a:extLst>
+              </p:cNvPr>
+              <p:cNvSpPr/>
+              <p:nvPr/>
+            </p:nvSpPr>
+            <p:spPr>
+              <a:xfrm>
+                <a:off x="8922590" y="2336595"/>
+                <a:ext cx="1269773" cy="1008075"/>
+              </a:xfrm>
+              <a:prstGeom prst="roundRect">
+                <a:avLst>
+                  <a:gd name="adj" fmla="val 9259"/>
+                </a:avLst>
+              </a:prstGeom>
+              <a:solidFill>
+                <a:schemeClr val="bg1"/>
+              </a:solidFill>
+              <a:ln w="19050">
+                <a:solidFill>
+                  <a:schemeClr val="bg2">
+                    <a:lumMod val="25000"/>
+                  </a:schemeClr>
+                </a:solidFill>
+                <a:prstDash val="solid"/>
+              </a:ln>
+            </p:spPr>
+            <p:txBody>
+              <a:bodyPr/>
+              <a:lstStyle/>
+              <a:p>
+                <a:endParaRPr lang="es-ES" dirty="0"/>
+              </a:p>
+            </p:txBody>
+          </p:sp>
+          <p:sp>
+            <p:nvSpPr>
+              <p:cNvPr id="89" name="Text 18">
+                <a:extLst>
+                  <a:ext uri="{FF2B5EF4-FFF2-40B4-BE49-F238E27FC236}">
+                    <a16:creationId xmlns:a16="http://schemas.microsoft.com/office/drawing/2014/main" id="{307A7EE1-96AE-4EBD-F191-6036B634ABC0}"/>
+                  </a:ext>
+                </a:extLst>
+              </p:cNvPr>
+              <p:cNvSpPr/>
+              <p:nvPr/>
+            </p:nvSpPr>
+            <p:spPr>
+              <a:xfrm>
+                <a:off x="9196911" y="2336596"/>
+                <a:ext cx="938528" cy="543154"/>
+              </a:xfrm>
+              <a:prstGeom prst="rect">
+                <a:avLst/>
+              </a:prstGeom>
+              <a:noFill/>
+              <a:ln/>
+            </p:spPr>
+            <p:txBody>
+              <a:bodyPr wrap="square" lIns="25400" tIns="25400" rIns="25400" bIns="25400" rtlCol="0" anchor="ctr"/>
+              <a:lstStyle/>
+              <a:p>
+                <a:pPr marL="0" indent="0" algn="ctr">
+                  <a:buNone/>
+                </a:pPr>
+                <a:r>
+                  <a:rPr lang="en-US" sz="1200" b="1" dirty="0">
+                    <a:solidFill>
+                      <a:srgbClr val="212121"/>
+                    </a:solidFill>
+                    <a:latin typeface="Calibri" pitchFamily="34" charset="0"/>
+                    <a:ea typeface="Calibri" pitchFamily="34" charset="-122"/>
+                    <a:cs typeface="Calibri" pitchFamily="34" charset="-120"/>
+                  </a:rPr>
+                  <a:t>shapes.txt</a:t>
+                </a:r>
+                <a:endParaRPr lang="en-US" sz="1200" dirty="0"/>
+              </a:p>
+            </p:txBody>
+          </p:sp>
+          <p:pic>
+            <p:nvPicPr>
+              <p:cNvPr id="90" name="Gráfico 89">
+                <a:extLst>
+                  <a:ext uri="{FF2B5EF4-FFF2-40B4-BE49-F238E27FC236}">
+                    <a16:creationId xmlns:a16="http://schemas.microsoft.com/office/drawing/2014/main" id="{BDC31D5E-FD74-5A94-4F2D-0E931AE3E06A}"/>
+                  </a:ext>
+                </a:extLst>
+              </p:cNvPr>
+              <p:cNvPicPr>
+                <a:picLocks noChangeAspect="1"/>
+              </p:cNvPicPr>
+              <p:nvPr/>
+            </p:nvPicPr>
+            <p:blipFill>
+              <a:blip>
+                <a:extLst>
+                  <a:ext uri="{96DAC541-7B7A-43D3-8B79-37D633B846F1}">
+                    <asvg:svgBlip xmlns:asvg="http://schemas.microsoft.com/office/drawing/2016/SVG/main" r:embed="rId4"/>
+                  </a:ext>
+                </a:extLst>
+              </a:blip>
+              <a:stretch>
+                <a:fillRect/>
+              </a:stretch>
+            </p:blipFill>
+            <p:spPr>
+              <a:xfrm>
+                <a:off x="8972660" y="2422268"/>
+                <a:ext cx="389339" cy="389339"/>
+              </a:xfrm>
+              <a:prstGeom prst="rect">
+                <a:avLst/>
+              </a:prstGeom>
+            </p:spPr>
+          </p:pic>
+        </p:grpSp>
+        <p:sp>
+          <p:nvSpPr>
+            <p:cNvPr id="87" name="Text 18">
+              <a:extLst>
+                <a:ext uri="{FF2B5EF4-FFF2-40B4-BE49-F238E27FC236}">
+                  <a16:creationId xmlns:a16="http://schemas.microsoft.com/office/drawing/2014/main" id="{14066DE4-3ADE-3C44-B1D8-9C39FED38A80}"/>
+                </a:ext>
+              </a:extLst>
+            </p:cNvPr>
+            <p:cNvSpPr/>
+            <p:nvPr/>
+          </p:nvSpPr>
+          <p:spPr>
+            <a:xfrm>
+              <a:off x="1280160" y="2110415"/>
+              <a:ext cx="1078004" cy="609924"/>
+            </a:xfrm>
+            <a:prstGeom prst="rect">
+              <a:avLst/>
+            </a:prstGeom>
+            <a:noFill/>
+            <a:ln/>
+          </p:spPr>
+          <p:txBody>
+            <a:bodyPr wrap="square" lIns="25400" tIns="25400" rIns="25400" bIns="25400" rtlCol="0" anchor="ctr"/>
+            <a:lstStyle/>
+            <a:p>
+              <a:r>
+                <a:rPr lang="en-US" sz="1100" dirty="0" err="1">
+                  <a:latin typeface="Consolas" panose="020B0609020204030204" pitchFamily="49" charset="0"/>
+                </a:rPr>
+                <a:t>Geometría</a:t>
+              </a:r>
+              <a:r>
+                <a:rPr lang="en-US" sz="1100" dirty="0">
+                  <a:latin typeface="Consolas" panose="020B0609020204030204" pitchFamily="49" charset="0"/>
+                </a:rPr>
+                <a:t> del </a:t>
+              </a:r>
+              <a:r>
+                <a:rPr lang="en-US" sz="1100" dirty="0" err="1">
+                  <a:latin typeface="Consolas" panose="020B0609020204030204" pitchFamily="49" charset="0"/>
+                </a:rPr>
+                <a:t>trazado</a:t>
+              </a:r>
+              <a:endParaRPr lang="en-US" sz="1100" dirty="0">
+                <a:latin typeface="Consolas" panose="020B0609020204030204" pitchFamily="49" charset="0"/>
+              </a:endParaRPr>
+            </a:p>
+          </p:txBody>
+        </p:sp>
+      </p:grpSp>
+      <p:grpSp>
+        <p:nvGrpSpPr>
+          <p:cNvPr id="91" name="Grupo 90">
+            <a:extLst>
+              <a:ext uri="{FF2B5EF4-FFF2-40B4-BE49-F238E27FC236}">
+                <a16:creationId xmlns:a16="http://schemas.microsoft.com/office/drawing/2014/main" id="{04644D7A-F161-AE34-1099-111D7A8641BF}"/>
+              </a:ext>
+            </a:extLst>
+          </p:cNvPr>
+          <p:cNvGrpSpPr/>
+          <p:nvPr/>
+        </p:nvGrpSpPr>
+        <p:grpSpPr>
+          <a:xfrm>
+            <a:off x="2121735" y="5508760"/>
+            <a:ext cx="1277393" cy="1008075"/>
+            <a:chOff x="1080771" y="1712264"/>
+            <a:chExt cx="1277393" cy="1008075"/>
+          </a:xfrm>
+        </p:grpSpPr>
+        <p:grpSp>
+          <p:nvGrpSpPr>
+            <p:cNvPr id="92" name="Grupo 91">
+              <a:extLst>
+                <a:ext uri="{FF2B5EF4-FFF2-40B4-BE49-F238E27FC236}">
+                  <a16:creationId xmlns:a16="http://schemas.microsoft.com/office/drawing/2014/main" id="{1A461F1B-9D2B-B799-0315-2B02DF7E4992}"/>
+                </a:ext>
+              </a:extLst>
+            </p:cNvPr>
+            <p:cNvGrpSpPr/>
+            <p:nvPr/>
+          </p:nvGrpSpPr>
+          <p:grpSpPr>
+            <a:xfrm>
+              <a:off x="1080771" y="1712264"/>
+              <a:ext cx="1269773" cy="1008075"/>
+              <a:chOff x="8922590" y="2336595"/>
+              <a:chExt cx="1269773" cy="1008075"/>
+            </a:xfrm>
+          </p:grpSpPr>
+          <p:sp>
+            <p:nvSpPr>
+              <p:cNvPr id="94" name="Shape 17">
+                <a:extLst>
+                  <a:ext uri="{FF2B5EF4-FFF2-40B4-BE49-F238E27FC236}">
+                    <a16:creationId xmlns:a16="http://schemas.microsoft.com/office/drawing/2014/main" id="{4A5D01C3-6A5C-6C09-94A3-C2863B32E779}"/>
+                  </a:ext>
+                </a:extLst>
+              </p:cNvPr>
+              <p:cNvSpPr/>
+              <p:nvPr/>
+            </p:nvSpPr>
+            <p:spPr>
+              <a:xfrm>
+                <a:off x="8922590" y="2336595"/>
+                <a:ext cx="1269773" cy="1008075"/>
+              </a:xfrm>
+              <a:prstGeom prst="roundRect">
+                <a:avLst>
+                  <a:gd name="adj" fmla="val 9259"/>
+                </a:avLst>
+              </a:prstGeom>
+              <a:solidFill>
+                <a:schemeClr val="bg1"/>
+              </a:solidFill>
+              <a:ln w="19050">
+                <a:solidFill>
+                  <a:schemeClr val="bg2">
+                    <a:lumMod val="25000"/>
+                  </a:schemeClr>
+                </a:solidFill>
+                <a:prstDash val="solid"/>
+              </a:ln>
+            </p:spPr>
+            <p:txBody>
+              <a:bodyPr/>
+              <a:lstStyle/>
+              <a:p>
+                <a:endParaRPr lang="es-ES" dirty="0"/>
+              </a:p>
+            </p:txBody>
+          </p:sp>
+          <p:sp>
+            <p:nvSpPr>
+              <p:cNvPr id="95" name="Text 18">
+                <a:extLst>
+                  <a:ext uri="{FF2B5EF4-FFF2-40B4-BE49-F238E27FC236}">
+                    <a16:creationId xmlns:a16="http://schemas.microsoft.com/office/drawing/2014/main" id="{0D32921F-6C65-196E-28F4-7380F796BE40}"/>
+                  </a:ext>
+                </a:extLst>
+              </p:cNvPr>
+              <p:cNvSpPr/>
+              <p:nvPr/>
+            </p:nvSpPr>
+            <p:spPr>
+              <a:xfrm>
+                <a:off x="9196911" y="2336596"/>
+                <a:ext cx="938528" cy="543154"/>
+              </a:xfrm>
+              <a:prstGeom prst="rect">
+                <a:avLst/>
+              </a:prstGeom>
+              <a:noFill/>
+              <a:ln/>
+            </p:spPr>
+            <p:txBody>
+              <a:bodyPr wrap="square" lIns="25400" tIns="25400" rIns="25400" bIns="25400" rtlCol="0" anchor="ctr"/>
+              <a:lstStyle/>
+              <a:p>
+                <a:pPr marL="0" indent="0" algn="ctr">
+                  <a:buNone/>
+                </a:pPr>
+                <a:r>
+                  <a:rPr lang="en-US" sz="1200" b="1" dirty="0">
+                    <a:solidFill>
+                      <a:srgbClr val="212121"/>
+                    </a:solidFill>
+                    <a:latin typeface="Calibri" pitchFamily="34" charset="0"/>
+                    <a:ea typeface="Calibri" pitchFamily="34" charset="-122"/>
+                    <a:cs typeface="Calibri" pitchFamily="34" charset="-120"/>
+                  </a:rPr>
+                  <a:t>agency.txt</a:t>
+                </a:r>
+                <a:endParaRPr lang="en-US" sz="1200" dirty="0"/>
+              </a:p>
+            </p:txBody>
+          </p:sp>
+          <p:pic>
+            <p:nvPicPr>
+              <p:cNvPr id="96" name="Gráfico 95">
+                <a:extLst>
+                  <a:ext uri="{FF2B5EF4-FFF2-40B4-BE49-F238E27FC236}">
+                    <a16:creationId xmlns:a16="http://schemas.microsoft.com/office/drawing/2014/main" id="{9FB5B9E6-48B7-9DA4-680F-F9F9C62E3510}"/>
+                  </a:ext>
+                </a:extLst>
+              </p:cNvPr>
+              <p:cNvPicPr>
+                <a:picLocks noChangeAspect="1"/>
+              </p:cNvPicPr>
+              <p:nvPr/>
+            </p:nvPicPr>
+            <p:blipFill>
+              <a:blip>
+                <a:extLst>
+                  <a:ext uri="{96DAC541-7B7A-43D3-8B79-37D633B846F1}">
+                    <asvg:svgBlip xmlns:asvg="http://schemas.microsoft.com/office/drawing/2016/SVG/main" r:embed="rId4"/>
+                  </a:ext>
+                </a:extLst>
+              </a:blip>
+              <a:stretch>
+                <a:fillRect/>
+              </a:stretch>
+            </p:blipFill>
+            <p:spPr>
+              <a:xfrm>
+                <a:off x="8972660" y="2422268"/>
+                <a:ext cx="389339" cy="389339"/>
+              </a:xfrm>
+              <a:prstGeom prst="rect">
+                <a:avLst/>
+              </a:prstGeom>
+            </p:spPr>
+          </p:pic>
+        </p:grpSp>
+        <p:sp>
+          <p:nvSpPr>
+            <p:cNvPr id="93" name="Text 18">
+              <a:extLst>
+                <a:ext uri="{FF2B5EF4-FFF2-40B4-BE49-F238E27FC236}">
+                  <a16:creationId xmlns:a16="http://schemas.microsoft.com/office/drawing/2014/main" id="{5EAE76D4-D4EC-A5F6-90E7-6442B364AE14}"/>
+                </a:ext>
+              </a:extLst>
+            </p:cNvPr>
+            <p:cNvSpPr/>
+            <p:nvPr/>
+          </p:nvSpPr>
+          <p:spPr>
+            <a:xfrm>
+              <a:off x="1280160" y="2110415"/>
+              <a:ext cx="1078004" cy="609924"/>
+            </a:xfrm>
+            <a:prstGeom prst="rect">
+              <a:avLst/>
+            </a:prstGeom>
+            <a:noFill/>
+            <a:ln/>
+          </p:spPr>
+          <p:txBody>
+            <a:bodyPr wrap="square" lIns="25400" tIns="25400" rIns="25400" bIns="25400" rtlCol="0" anchor="ctr"/>
+            <a:lstStyle/>
+            <a:p>
+              <a:r>
+                <a:rPr lang="en-US" sz="1100" dirty="0" err="1">
+                  <a:latin typeface="Consolas" panose="020B0609020204030204" pitchFamily="49" charset="0"/>
+                </a:rPr>
+                <a:t>Información</a:t>
+              </a:r>
+              <a:r>
+                <a:rPr lang="en-US" sz="1100" dirty="0">
+                  <a:latin typeface="Consolas" panose="020B0609020204030204" pitchFamily="49" charset="0"/>
+                </a:rPr>
+                <a:t> del </a:t>
+              </a:r>
+              <a:r>
+                <a:rPr lang="en-US" sz="1100" dirty="0" err="1">
+                  <a:latin typeface="Consolas" panose="020B0609020204030204" pitchFamily="49" charset="0"/>
+                </a:rPr>
+                <a:t>operador</a:t>
+              </a:r>
+              <a:endParaRPr lang="en-US" sz="1100" dirty="0">
+                <a:latin typeface="Consolas" panose="020B0609020204030204" pitchFamily="49" charset="0"/>
+              </a:endParaRPr>
+            </a:p>
+          </p:txBody>
+        </p:sp>
+      </p:grpSp>
+      <p:sp>
+        <p:nvSpPr>
+          <p:cNvPr id="102" name="CuadroTexto 101">
+            <a:extLst>
+              <a:ext uri="{FF2B5EF4-FFF2-40B4-BE49-F238E27FC236}">
+                <a16:creationId xmlns:a16="http://schemas.microsoft.com/office/drawing/2014/main" id="{DBDBF5C0-8074-8182-1F03-03AE2997520A}"/>
+              </a:ext>
+            </a:extLst>
+          </p:cNvPr>
+          <p:cNvSpPr txBox="1"/>
+          <p:nvPr/>
+        </p:nvSpPr>
+        <p:spPr>
+          <a:xfrm>
+            <a:off x="2532917" y="2526235"/>
+            <a:ext cx="1000246" cy="338554"/>
+          </a:xfrm>
+          <a:prstGeom prst="rect">
+            <a:avLst/>
+          </a:prstGeom>
+          <a:noFill/>
+        </p:spPr>
+        <p:txBody>
+          <a:bodyPr wrap="square" rtlCol="0">
+            <a:spAutoFit/>
+          </a:bodyPr>
+          <a:lstStyle/>
+          <a:p>
+            <a:r>
+              <a:rPr lang="es-ES" sz="1600" b="1" dirty="0" err="1">
+                <a:latin typeface="Consolas" panose="020B0609020204030204" pitchFamily="49" charset="0"/>
+              </a:rPr>
+              <a:t>stop_id</a:t>
+            </a:r>
+            <a:endParaRPr lang="es-ES" sz="1600" b="1" dirty="0">
+              <a:latin typeface="Consolas" panose="020B0609020204030204" pitchFamily="49" charset="0"/>
+            </a:endParaRPr>
+          </a:p>
+        </p:txBody>
+      </p:sp>
+      <p:sp>
+        <p:nvSpPr>
+          <p:cNvPr id="107" name="CuadroTexto 106">
+            <a:extLst>
+              <a:ext uri="{FF2B5EF4-FFF2-40B4-BE49-F238E27FC236}">
+                <a16:creationId xmlns:a16="http://schemas.microsoft.com/office/drawing/2014/main" id="{49831478-678F-C9DA-F174-3042456BCADA}"/>
+              </a:ext>
+            </a:extLst>
+          </p:cNvPr>
+          <p:cNvSpPr txBox="1"/>
+          <p:nvPr/>
+        </p:nvSpPr>
+        <p:spPr>
+          <a:xfrm>
+            <a:off x="5409253" y="2504780"/>
+            <a:ext cx="1050066" cy="338554"/>
+          </a:xfrm>
+          <a:prstGeom prst="rect">
+            <a:avLst/>
+          </a:prstGeom>
+          <a:noFill/>
+        </p:spPr>
+        <p:txBody>
+          <a:bodyPr wrap="square" rtlCol="0">
+            <a:spAutoFit/>
+          </a:bodyPr>
+          <a:lstStyle/>
+          <a:p>
+            <a:r>
+              <a:rPr lang="es-ES" sz="1600" b="1" dirty="0" err="1">
+                <a:latin typeface="Consolas" panose="020B0609020204030204" pitchFamily="49" charset="0"/>
+              </a:rPr>
+              <a:t>trip_id</a:t>
+            </a:r>
+            <a:endParaRPr lang="es-ES" sz="1600" b="1" dirty="0">
+              <a:latin typeface="Consolas" panose="020B0609020204030204" pitchFamily="49" charset="0"/>
+            </a:endParaRPr>
+          </a:p>
+        </p:txBody>
+      </p:sp>
+      <p:sp>
+        <p:nvSpPr>
+          <p:cNvPr id="112" name="CuadroTexto 111">
+            <a:extLst>
+              <a:ext uri="{FF2B5EF4-FFF2-40B4-BE49-F238E27FC236}">
+                <a16:creationId xmlns:a16="http://schemas.microsoft.com/office/drawing/2014/main" id="{08F07B4F-9648-DD56-4F3D-95A82B6203D4}"/>
+              </a:ext>
+            </a:extLst>
+          </p:cNvPr>
+          <p:cNvSpPr txBox="1"/>
+          <p:nvPr/>
+        </p:nvSpPr>
+        <p:spPr>
+          <a:xfrm>
+            <a:off x="7874175" y="2502070"/>
+            <a:ext cx="1141378" cy="338554"/>
+          </a:xfrm>
+          <a:prstGeom prst="rect">
+            <a:avLst/>
+          </a:prstGeom>
+          <a:noFill/>
+        </p:spPr>
+        <p:txBody>
+          <a:bodyPr wrap="square" rtlCol="0">
+            <a:spAutoFit/>
+          </a:bodyPr>
+          <a:lstStyle/>
+          <a:p>
+            <a:r>
+              <a:rPr lang="es-ES" sz="1600" b="1" dirty="0" err="1">
+                <a:latin typeface="Consolas" panose="020B0609020204030204" pitchFamily="49" charset="0"/>
+              </a:rPr>
+              <a:t>route_id</a:t>
+            </a:r>
+            <a:endParaRPr lang="es-ES" sz="1600" b="1" dirty="0">
+              <a:latin typeface="Consolas" panose="020B0609020204030204" pitchFamily="49" charset="0"/>
+            </a:endParaRPr>
+          </a:p>
+        </p:txBody>
+      </p:sp>
+      <p:sp>
+        <p:nvSpPr>
+          <p:cNvPr id="114" name="CuadroTexto 113">
+            <a:extLst>
+              <a:ext uri="{FF2B5EF4-FFF2-40B4-BE49-F238E27FC236}">
+                <a16:creationId xmlns:a16="http://schemas.microsoft.com/office/drawing/2014/main" id="{80889FD8-C0DD-C427-9522-312AFF50064B}"/>
+              </a:ext>
+            </a:extLst>
+          </p:cNvPr>
+          <p:cNvSpPr txBox="1"/>
+          <p:nvPr/>
+        </p:nvSpPr>
+        <p:spPr>
+          <a:xfrm>
+            <a:off x="2518466" y="2840624"/>
+            <a:ext cx="912495" cy="307777"/>
+          </a:xfrm>
+          <a:prstGeom prst="rect">
+            <a:avLst/>
+          </a:prstGeom>
+          <a:noFill/>
+        </p:spPr>
+        <p:txBody>
+          <a:bodyPr wrap="square" rtlCol="0">
+            <a:spAutoFit/>
+          </a:bodyPr>
+          <a:lstStyle/>
+          <a:p>
+            <a:pPr algn="ctr"/>
+            <a:r>
+              <a:rPr lang="es-ES" sz="1400" dirty="0">
+                <a:latin typeface="Consolas" panose="020B0609020204030204" pitchFamily="49" charset="0"/>
+              </a:rPr>
+              <a:t>1..N</a:t>
+            </a:r>
+          </a:p>
+        </p:txBody>
+      </p:sp>
+      <p:sp>
+        <p:nvSpPr>
+          <p:cNvPr id="116" name="CuadroTexto 115">
+            <a:extLst>
+              <a:ext uri="{FF2B5EF4-FFF2-40B4-BE49-F238E27FC236}">
+                <a16:creationId xmlns:a16="http://schemas.microsoft.com/office/drawing/2014/main" id="{88C4EF85-EDFD-559E-59D4-63D991F489EB}"/>
+              </a:ext>
+            </a:extLst>
+          </p:cNvPr>
+          <p:cNvSpPr txBox="1"/>
+          <p:nvPr/>
+        </p:nvSpPr>
+        <p:spPr>
+          <a:xfrm>
+            <a:off x="5399496" y="2862990"/>
+            <a:ext cx="912495" cy="307777"/>
+          </a:xfrm>
+          <a:prstGeom prst="rect">
+            <a:avLst/>
+          </a:prstGeom>
+          <a:noFill/>
+        </p:spPr>
+        <p:txBody>
+          <a:bodyPr wrap="square" rtlCol="0">
+            <a:spAutoFit/>
+          </a:bodyPr>
+          <a:lstStyle/>
+          <a:p>
+            <a:pPr algn="ctr"/>
+            <a:r>
+              <a:rPr lang="es-ES" sz="1400" dirty="0">
+                <a:latin typeface="Consolas" panose="020B0609020204030204" pitchFamily="49" charset="0"/>
+              </a:rPr>
+              <a:t>N..1</a:t>
+            </a:r>
+          </a:p>
+        </p:txBody>
+      </p:sp>
+      <p:sp>
+        <p:nvSpPr>
+          <p:cNvPr id="118" name="CuadroTexto 117">
+            <a:extLst>
+              <a:ext uri="{FF2B5EF4-FFF2-40B4-BE49-F238E27FC236}">
+                <a16:creationId xmlns:a16="http://schemas.microsoft.com/office/drawing/2014/main" id="{3C7883E3-7FBC-44B8-F9FE-20D394F0D587}"/>
+              </a:ext>
+            </a:extLst>
+          </p:cNvPr>
+          <p:cNvSpPr txBox="1"/>
+          <p:nvPr/>
+        </p:nvSpPr>
+        <p:spPr>
+          <a:xfrm>
+            <a:off x="7889268" y="2862990"/>
+            <a:ext cx="912495" cy="307777"/>
+          </a:xfrm>
+          <a:prstGeom prst="rect">
+            <a:avLst/>
+          </a:prstGeom>
+          <a:noFill/>
+        </p:spPr>
+        <p:txBody>
+          <a:bodyPr wrap="square" rtlCol="0">
+            <a:spAutoFit/>
+          </a:bodyPr>
+          <a:lstStyle/>
+          <a:p>
+            <a:pPr algn="ctr"/>
+            <a:r>
+              <a:rPr lang="es-ES" sz="1400" dirty="0">
+                <a:latin typeface="Consolas" panose="020B0609020204030204" pitchFamily="49" charset="0"/>
+              </a:rPr>
+              <a:t>N..1</a:t>
+            </a:r>
+          </a:p>
+        </p:txBody>
+      </p:sp>
+      <p:cxnSp>
+        <p:nvCxnSpPr>
+          <p:cNvPr id="124" name="Conector: angular 123">
+            <a:extLst>
+              <a:ext uri="{FF2B5EF4-FFF2-40B4-BE49-F238E27FC236}">
+                <a16:creationId xmlns:a16="http://schemas.microsoft.com/office/drawing/2014/main" id="{D0D33DD3-ED9D-D3C5-F467-DB75A986B86B}"/>
+              </a:ext>
+            </a:extLst>
+          </p:cNvPr>
+          <p:cNvCxnSpPr>
+            <a:cxnSpLocks/>
+            <a:stCxn id="29" idx="3"/>
+            <a:endCxn id="64" idx="1"/>
+          </p:cNvCxnSpPr>
+          <p:nvPr/>
+        </p:nvCxnSpPr>
+        <p:spPr>
+          <a:xfrm>
+            <a:off x="2410216" y="2875825"/>
+            <a:ext cx="1233696" cy="199"/>
+          </a:xfrm>
+          <a:prstGeom prst="bentConnector3">
+            <a:avLst>
+              <a:gd name="adj1" fmla="val 50000"/>
+            </a:avLst>
+          </a:prstGeom>
+          <a:ln>
+            <a:headEnd type="triangle"/>
+            <a:tailEnd type="triangle"/>
+          </a:ln>
+        </p:spPr>
+        <p:style>
+          <a:lnRef idx="2">
+            <a:schemeClr val="dk1"/>
+          </a:lnRef>
+          <a:fillRef idx="0">
+            <a:schemeClr val="dk1"/>
+          </a:fillRef>
+          <a:effectRef idx="1">
+            <a:schemeClr val="dk1"/>
+          </a:effectRef>
+          <a:fontRef idx="minor">
+            <a:schemeClr val="tx1"/>
+          </a:fontRef>
+        </p:style>
+      </p:cxnSp>
+      <p:cxnSp>
+        <p:nvCxnSpPr>
+          <p:cNvPr id="128" name="Conector: angular 127">
+            <a:extLst>
+              <a:ext uri="{FF2B5EF4-FFF2-40B4-BE49-F238E27FC236}">
+                <a16:creationId xmlns:a16="http://schemas.microsoft.com/office/drawing/2014/main" id="{74155F07-69B1-73AC-BC09-0B098483EB28}"/>
+              </a:ext>
+            </a:extLst>
+          </p:cNvPr>
+          <p:cNvCxnSpPr>
+            <a:cxnSpLocks/>
+            <a:stCxn id="64" idx="3"/>
+            <a:endCxn id="70" idx="1"/>
+          </p:cNvCxnSpPr>
+          <p:nvPr/>
+        </p:nvCxnSpPr>
+        <p:spPr>
+          <a:xfrm flipV="1">
+            <a:off x="5175232" y="2872608"/>
+            <a:ext cx="1386974" cy="3416"/>
+          </a:xfrm>
+          <a:prstGeom prst="bentConnector3">
+            <a:avLst/>
+          </a:prstGeom>
+          <a:ln>
+            <a:headEnd type="triangle"/>
+            <a:tailEnd type="triangle"/>
+          </a:ln>
+        </p:spPr>
+        <p:style>
+          <a:lnRef idx="2">
+            <a:schemeClr val="dk1"/>
+          </a:lnRef>
+          <a:fillRef idx="0">
+            <a:schemeClr val="dk1"/>
+          </a:fillRef>
+          <a:effectRef idx="1">
+            <a:schemeClr val="dk1"/>
+          </a:effectRef>
+          <a:fontRef idx="minor">
+            <a:schemeClr val="tx1"/>
+          </a:fontRef>
+        </p:style>
+      </p:cxnSp>
+      <p:cxnSp>
+        <p:nvCxnSpPr>
+          <p:cNvPr id="130" name="Conector: angular 129">
+            <a:extLst>
+              <a:ext uri="{FF2B5EF4-FFF2-40B4-BE49-F238E27FC236}">
+                <a16:creationId xmlns:a16="http://schemas.microsoft.com/office/drawing/2014/main" id="{3B01DD1C-2263-C6ED-6E5D-3048CA8D778E}"/>
+              </a:ext>
+            </a:extLst>
+          </p:cNvPr>
+          <p:cNvCxnSpPr>
+            <a:stCxn id="70" idx="3"/>
+            <a:endCxn id="76" idx="1"/>
+          </p:cNvCxnSpPr>
+          <p:nvPr/>
+        </p:nvCxnSpPr>
+        <p:spPr>
+          <a:xfrm flipV="1">
+            <a:off x="7824404" y="2871831"/>
+            <a:ext cx="1122947" cy="777"/>
+          </a:xfrm>
+          <a:prstGeom prst="bentConnector3">
+            <a:avLst/>
+          </a:prstGeom>
+          <a:ln>
+            <a:headEnd type="triangle"/>
+            <a:tailEnd type="triangle"/>
+          </a:ln>
+        </p:spPr>
+        <p:style>
+          <a:lnRef idx="2">
+            <a:schemeClr val="dk1"/>
+          </a:lnRef>
+          <a:fillRef idx="0">
+            <a:schemeClr val="dk1"/>
+          </a:fillRef>
+          <a:effectRef idx="1">
+            <a:schemeClr val="dk1"/>
+          </a:effectRef>
+          <a:fontRef idx="minor">
+            <a:schemeClr val="tx1"/>
+          </a:fontRef>
+        </p:style>
+      </p:cxnSp>
+      <p:sp>
+        <p:nvSpPr>
+          <p:cNvPr id="139" name="CuadroTexto 138">
+            <a:extLst>
+              <a:ext uri="{FF2B5EF4-FFF2-40B4-BE49-F238E27FC236}">
+                <a16:creationId xmlns:a16="http://schemas.microsoft.com/office/drawing/2014/main" id="{6D802F6D-14D5-F6EF-02BA-E75D33382D19}"/>
+              </a:ext>
+            </a:extLst>
+          </p:cNvPr>
+          <p:cNvSpPr txBox="1"/>
+          <p:nvPr/>
+        </p:nvSpPr>
+        <p:spPr>
+          <a:xfrm>
+            <a:off x="5868719" y="3837034"/>
+            <a:ext cx="1334681" cy="338554"/>
+          </a:xfrm>
+          <a:prstGeom prst="rect">
+            <a:avLst/>
+          </a:prstGeom>
+          <a:noFill/>
+        </p:spPr>
+        <p:txBody>
+          <a:bodyPr wrap="square" rtlCol="0">
+            <a:spAutoFit/>
+          </a:bodyPr>
+          <a:lstStyle/>
+          <a:p>
+            <a:r>
+              <a:rPr lang="es-ES" sz="1600" b="1" dirty="0" err="1">
+                <a:latin typeface="Consolas" panose="020B0609020204030204" pitchFamily="49" charset="0"/>
+              </a:rPr>
+              <a:t>service_id</a:t>
+            </a:r>
+            <a:endParaRPr lang="es-ES" sz="1600" b="1" dirty="0">
+              <a:latin typeface="Consolas" panose="020B0609020204030204" pitchFamily="49" charset="0"/>
+            </a:endParaRPr>
+          </a:p>
+        </p:txBody>
+      </p:sp>
+      <p:sp>
+        <p:nvSpPr>
+          <p:cNvPr id="141" name="CuadroTexto 140">
+            <a:extLst>
+              <a:ext uri="{FF2B5EF4-FFF2-40B4-BE49-F238E27FC236}">
+                <a16:creationId xmlns:a16="http://schemas.microsoft.com/office/drawing/2014/main" id="{C5EFFC7F-786A-1398-EA40-3B915D75506E}"/>
+              </a:ext>
+            </a:extLst>
+          </p:cNvPr>
+          <p:cNvSpPr txBox="1"/>
+          <p:nvPr/>
+        </p:nvSpPr>
+        <p:spPr>
+          <a:xfrm>
+            <a:off x="7180156" y="3529842"/>
+            <a:ext cx="301732" cy="738664"/>
+          </a:xfrm>
+          <a:prstGeom prst="rect">
+            <a:avLst/>
+          </a:prstGeom>
+          <a:noFill/>
+        </p:spPr>
+        <p:txBody>
+          <a:bodyPr wrap="square" rtlCol="0">
+            <a:spAutoFit/>
+          </a:bodyPr>
+          <a:lstStyle/>
+          <a:p>
+            <a:pPr algn="ctr"/>
+            <a:r>
+              <a:rPr lang="es-ES" sz="1400" dirty="0">
+                <a:latin typeface="Consolas" panose="020B0609020204030204" pitchFamily="49" charset="0"/>
+              </a:rPr>
+              <a:t>N:1</a:t>
+            </a:r>
+          </a:p>
+        </p:txBody>
+      </p:sp>
+      <p:sp>
+        <p:nvSpPr>
+          <p:cNvPr id="144" name="CuadroTexto 143">
+            <a:extLst>
+              <a:ext uri="{FF2B5EF4-FFF2-40B4-BE49-F238E27FC236}">
+                <a16:creationId xmlns:a16="http://schemas.microsoft.com/office/drawing/2014/main" id="{3BCEA4CD-C18B-8CFC-EE6B-419315C6288C}"/>
+              </a:ext>
+            </a:extLst>
+          </p:cNvPr>
+          <p:cNvSpPr txBox="1"/>
+          <p:nvPr/>
+        </p:nvSpPr>
+        <p:spPr>
+          <a:xfrm>
+            <a:off x="889150" y="1374801"/>
+            <a:ext cx="10182710" cy="400110"/>
+          </a:xfrm>
+          <a:prstGeom prst="rect">
+            <a:avLst/>
+          </a:prstGeom>
+          <a:noFill/>
+        </p:spPr>
+        <p:txBody>
+          <a:bodyPr wrap="square" rtlCol="0">
+            <a:spAutoFit/>
+          </a:bodyPr>
+          <a:lstStyle/>
+          <a:p>
+            <a:pPr algn="ctr"/>
+            <a:r>
+              <a:rPr lang="es-ES" sz="2000" b="1" dirty="0">
+                <a:solidFill>
+                  <a:srgbClr val="0070C0"/>
+                </a:solidFill>
+                <a:latin typeface="Calibri" panose="020F0502020204030204" pitchFamily="34" charset="0"/>
+                <a:ea typeface="Calibri" panose="020F0502020204030204" pitchFamily="34" charset="0"/>
+                <a:cs typeface="Calibri" panose="020F0502020204030204" pitchFamily="34" charset="0"/>
+              </a:rPr>
+              <a:t>¿Qué líneas pasan por una parada?</a:t>
+            </a:r>
+          </a:p>
+        </p:txBody>
+      </p:sp>
+      <p:cxnSp>
+        <p:nvCxnSpPr>
+          <p:cNvPr id="157" name="Conector recto de flecha 156">
+            <a:extLst>
+              <a:ext uri="{FF2B5EF4-FFF2-40B4-BE49-F238E27FC236}">
+                <a16:creationId xmlns:a16="http://schemas.microsoft.com/office/drawing/2014/main" id="{E18D463A-2D43-C879-8AC6-6784B333BF62}"/>
+              </a:ext>
+            </a:extLst>
+          </p:cNvPr>
+          <p:cNvCxnSpPr>
+            <a:cxnSpLocks/>
+          </p:cNvCxnSpPr>
+          <p:nvPr/>
+        </p:nvCxnSpPr>
+        <p:spPr>
+          <a:xfrm flipH="1" flipV="1">
+            <a:off x="4595149" y="3826899"/>
+            <a:ext cx="6091074" cy="8679"/>
+          </a:xfrm>
+          <a:prstGeom prst="straightConnector1">
+            <a:avLst/>
+          </a:prstGeom>
+          <a:ln w="57150">
+            <a:solidFill>
+              <a:srgbClr val="FF0000"/>
+            </a:solidFill>
+            <a:tailEnd type="triangle"/>
+          </a:ln>
+        </p:spPr>
+        <p:style>
+          <a:lnRef idx="2">
+            <a:schemeClr val="accent1"/>
+          </a:lnRef>
+          <a:fillRef idx="0">
+            <a:schemeClr val="accent1"/>
+          </a:fillRef>
+          <a:effectRef idx="1">
+            <a:schemeClr val="accent1"/>
+          </a:effectRef>
+          <a:fontRef idx="minor">
+            <a:schemeClr val="tx1"/>
+          </a:fontRef>
+        </p:style>
+      </p:cxnSp>
+      <p:cxnSp>
+        <p:nvCxnSpPr>
+          <p:cNvPr id="161" name="Conector: angular 160">
+            <a:extLst>
+              <a:ext uri="{FF2B5EF4-FFF2-40B4-BE49-F238E27FC236}">
+                <a16:creationId xmlns:a16="http://schemas.microsoft.com/office/drawing/2014/main" id="{2D980C9D-523B-8944-1D06-5EBE801CCD3A}"/>
+              </a:ext>
+            </a:extLst>
+          </p:cNvPr>
+          <p:cNvCxnSpPr>
+            <a:cxnSpLocks/>
+          </p:cNvCxnSpPr>
+          <p:nvPr/>
+        </p:nvCxnSpPr>
+        <p:spPr>
+          <a:xfrm rot="10800000" flipV="1">
+            <a:off x="8237758" y="4580325"/>
+            <a:ext cx="2464584" cy="1172140"/>
+          </a:xfrm>
+          <a:prstGeom prst="bentConnector3">
+            <a:avLst>
+              <a:gd name="adj1" fmla="val 100087"/>
+            </a:avLst>
+          </a:prstGeom>
+          <a:ln w="57150">
+            <a:solidFill>
+              <a:srgbClr val="FF0000"/>
+            </a:solidFill>
+            <a:tailEnd type="triangle"/>
+          </a:ln>
+        </p:spPr>
+        <p:style>
+          <a:lnRef idx="2">
+            <a:schemeClr val="accent1"/>
+          </a:lnRef>
+          <a:fillRef idx="0">
+            <a:schemeClr val="accent1"/>
+          </a:fillRef>
+          <a:effectRef idx="1">
+            <a:schemeClr val="accent1"/>
+          </a:effectRef>
+          <a:fontRef idx="minor">
+            <a:schemeClr val="tx1"/>
+          </a:fontRef>
+        </p:style>
+      </p:cxnSp>
+      <p:cxnSp>
+        <p:nvCxnSpPr>
+          <p:cNvPr id="132" name="Conector: angular 131">
+            <a:extLst>
+              <a:ext uri="{FF2B5EF4-FFF2-40B4-BE49-F238E27FC236}">
+                <a16:creationId xmlns:a16="http://schemas.microsoft.com/office/drawing/2014/main" id="{4FC2A847-10A1-9AAA-F765-6A0FC0674BAB}"/>
+              </a:ext>
+            </a:extLst>
+          </p:cNvPr>
+          <p:cNvCxnSpPr>
+            <a:stCxn id="70" idx="2"/>
+            <a:endCxn id="82" idx="0"/>
+          </p:cNvCxnSpPr>
+          <p:nvPr/>
+        </p:nvCxnSpPr>
+        <p:spPr>
+          <a:xfrm rot="16200000" flipH="1">
+            <a:off x="6770717" y="3994549"/>
+            <a:ext cx="846550" cy="1375"/>
+          </a:xfrm>
+          <a:prstGeom prst="bentConnector3">
+            <a:avLst/>
+          </a:prstGeom>
+          <a:ln>
+            <a:tailEnd type="triangle"/>
+          </a:ln>
+        </p:spPr>
+        <p:style>
+          <a:lnRef idx="2">
+            <a:schemeClr val="dk1"/>
+          </a:lnRef>
+          <a:fillRef idx="0">
+            <a:schemeClr val="dk1"/>
+          </a:fillRef>
+          <a:effectRef idx="1">
+            <a:schemeClr val="dk1"/>
+          </a:effectRef>
+          <a:fontRef idx="minor">
+            <a:schemeClr val="tx1"/>
+          </a:fontRef>
+        </p:style>
+      </p:cxnSp>
+      <p:sp>
+        <p:nvSpPr>
+          <p:cNvPr id="169" name="CuadroTexto 168">
+            <a:extLst>
+              <a:ext uri="{FF2B5EF4-FFF2-40B4-BE49-F238E27FC236}">
+                <a16:creationId xmlns:a16="http://schemas.microsoft.com/office/drawing/2014/main" id="{F06BDDDB-EE93-BF0F-0C89-C308481D6D1A}"/>
+              </a:ext>
+            </a:extLst>
+          </p:cNvPr>
+          <p:cNvSpPr txBox="1"/>
+          <p:nvPr/>
+        </p:nvSpPr>
+        <p:spPr>
+          <a:xfrm>
+            <a:off x="7713915" y="3845541"/>
+            <a:ext cx="4283745" cy="707886"/>
+          </a:xfrm>
+          <a:prstGeom prst="rect">
+            <a:avLst/>
+          </a:prstGeom>
+          <a:noFill/>
+        </p:spPr>
+        <p:txBody>
+          <a:bodyPr wrap="square" rtlCol="0">
+            <a:spAutoFit/>
+          </a:bodyPr>
+          <a:lstStyle/>
+          <a:p>
+            <a:pPr algn="ctr"/>
+            <a:r>
+              <a:rPr lang="es-ES" sz="2000" b="1" dirty="0">
+                <a:solidFill>
+                  <a:srgbClr val="FF0000"/>
+                </a:solidFill>
+                <a:latin typeface="Calibri" panose="020F0502020204030204" pitchFamily="34" charset="0"/>
+                <a:ea typeface="Calibri" panose="020F0502020204030204" pitchFamily="34" charset="0"/>
+                <a:cs typeface="Calibri" panose="020F0502020204030204" pitchFamily="34" charset="0"/>
+              </a:rPr>
+              <a:t>¿Cuál es el horario de una ruta para una fecha concreta?</a:t>
+            </a:r>
+          </a:p>
+        </p:txBody>
+      </p:sp>
+      <p:sp>
+        <p:nvSpPr>
+          <p:cNvPr id="172" name="CuadroTexto 171">
+            <a:extLst>
+              <a:ext uri="{FF2B5EF4-FFF2-40B4-BE49-F238E27FC236}">
+                <a16:creationId xmlns:a16="http://schemas.microsoft.com/office/drawing/2014/main" id="{1FBA871F-DD0B-B124-E37B-9B78EFA75E68}"/>
+              </a:ext>
+            </a:extLst>
+          </p:cNvPr>
+          <p:cNvSpPr txBox="1"/>
+          <p:nvPr/>
+        </p:nvSpPr>
+        <p:spPr>
+          <a:xfrm>
+            <a:off x="7467064" y="5742387"/>
+            <a:ext cx="1530058" cy="338554"/>
+          </a:xfrm>
+          <a:prstGeom prst="rect">
+            <a:avLst/>
+          </a:prstGeom>
+          <a:noFill/>
+        </p:spPr>
+        <p:txBody>
+          <a:bodyPr wrap="square" rtlCol="0">
+            <a:spAutoFit/>
+          </a:bodyPr>
+          <a:lstStyle/>
+          <a:p>
+            <a:pPr algn="ctr"/>
+            <a:r>
+              <a:rPr lang="es-ES" sz="1600" dirty="0">
+                <a:solidFill>
+                  <a:srgbClr val="C00000"/>
+                </a:solidFill>
+                <a:latin typeface="Calibri" panose="020F0502020204030204" pitchFamily="34" charset="0"/>
+                <a:ea typeface="Calibri" panose="020F0502020204030204" pitchFamily="34" charset="0"/>
+                <a:cs typeface="Calibri" panose="020F0502020204030204" pitchFamily="34" charset="0"/>
+              </a:rPr>
+              <a:t>Filtro por fecha</a:t>
+            </a:r>
+          </a:p>
+        </p:txBody>
+      </p:sp>
+      <p:sp>
+        <p:nvSpPr>
+          <p:cNvPr id="174" name="CuadroTexto 173">
+            <a:extLst>
+              <a:ext uri="{FF2B5EF4-FFF2-40B4-BE49-F238E27FC236}">
+                <a16:creationId xmlns:a16="http://schemas.microsoft.com/office/drawing/2014/main" id="{B081417B-BFD2-92B7-3F15-71BF1234886A}"/>
+              </a:ext>
+            </a:extLst>
+          </p:cNvPr>
+          <p:cNvSpPr txBox="1"/>
+          <p:nvPr/>
+        </p:nvSpPr>
+        <p:spPr>
+          <a:xfrm>
+            <a:off x="3216903" y="3676264"/>
+            <a:ext cx="1530058" cy="338554"/>
+          </a:xfrm>
+          <a:prstGeom prst="rect">
+            <a:avLst/>
+          </a:prstGeom>
+          <a:noFill/>
+        </p:spPr>
+        <p:txBody>
+          <a:bodyPr wrap="square" rtlCol="0">
+            <a:spAutoFit/>
+          </a:bodyPr>
+          <a:lstStyle/>
+          <a:p>
+            <a:pPr algn="ctr"/>
+            <a:r>
+              <a:rPr lang="es-ES" sz="1600" dirty="0">
+                <a:solidFill>
+                  <a:srgbClr val="C00000"/>
+                </a:solidFill>
+                <a:latin typeface="Calibri" panose="020F0502020204030204" pitchFamily="34" charset="0"/>
+                <a:ea typeface="Calibri" panose="020F0502020204030204" pitchFamily="34" charset="0"/>
+                <a:cs typeface="Calibri" panose="020F0502020204030204" pitchFamily="34" charset="0"/>
+              </a:rPr>
+              <a:t>Horarios</a:t>
+            </a:r>
+          </a:p>
+        </p:txBody>
+      </p:sp>
+      <p:sp>
+        <p:nvSpPr>
+          <p:cNvPr id="177" name="Text 0">
+            <a:extLst>
+              <a:ext uri="{FF2B5EF4-FFF2-40B4-BE49-F238E27FC236}">
+                <a16:creationId xmlns:a16="http://schemas.microsoft.com/office/drawing/2014/main" id="{78D380A8-BF50-E37F-30EF-286E7C3A1164}"/>
+              </a:ext>
+            </a:extLst>
+          </p:cNvPr>
+          <p:cNvSpPr/>
+          <p:nvPr/>
+        </p:nvSpPr>
+        <p:spPr>
+          <a:xfrm>
+            <a:off x="228600" y="27432"/>
+            <a:ext cx="11704320" cy="274320"/>
+          </a:xfrm>
+          <a:prstGeom prst="rect">
+            <a:avLst/>
+          </a:prstGeom>
+          <a:noFill/>
+          <a:ln/>
+        </p:spPr>
+        <p:txBody>
+          <a:bodyPr wrap="square" lIns="0" tIns="0" rIns="0" bIns="0" rtlCol="0" anchor="ctr"/>
+          <a:lstStyle/>
+          <a:p>
+            <a:pPr marL="0" indent="0" algn="l">
+              <a:buNone/>
+            </a:pPr>
+            <a:r>
+              <a:rPr lang="en-US" sz="1900" b="1" dirty="0">
+                <a:solidFill>
+                  <a:srgbClr val="212121"/>
+                </a:solidFill>
+                <a:latin typeface="Calibri" pitchFamily="34" charset="0"/>
+                <a:ea typeface="Calibri" pitchFamily="34" charset="-122"/>
+                <a:cs typeface="Calibri" pitchFamily="34" charset="-120"/>
+              </a:rPr>
+              <a:t>Cruce entre los </a:t>
+            </a:r>
+            <a:r>
+              <a:rPr lang="en-US" sz="1900" b="1" dirty="0" err="1">
+                <a:solidFill>
+                  <a:srgbClr val="212121"/>
+                </a:solidFill>
+                <a:latin typeface="Calibri" pitchFamily="34" charset="0"/>
+                <a:ea typeface="Calibri" pitchFamily="34" charset="-122"/>
+                <a:cs typeface="Calibri" pitchFamily="34" charset="-120"/>
+              </a:rPr>
+              <a:t>ficheros</a:t>
+            </a:r>
+            <a:r>
+              <a:rPr lang="en-US" sz="1900" b="1" dirty="0">
+                <a:solidFill>
+                  <a:srgbClr val="212121"/>
+                </a:solidFill>
+                <a:latin typeface="Calibri" pitchFamily="34" charset="0"/>
+                <a:ea typeface="Calibri" pitchFamily="34" charset="-122"/>
+                <a:cs typeface="Calibri" pitchFamily="34" charset="-120"/>
+              </a:rPr>
+              <a:t> del feed GTFS para resolver </a:t>
+            </a:r>
+            <a:r>
+              <a:rPr lang="en-US" sz="1900" b="1" dirty="0" err="1">
+                <a:solidFill>
+                  <a:srgbClr val="212121"/>
+                </a:solidFill>
+                <a:latin typeface="Calibri" pitchFamily="34" charset="0"/>
+                <a:ea typeface="Calibri" pitchFamily="34" charset="-122"/>
+                <a:cs typeface="Calibri" pitchFamily="34" charset="-120"/>
+              </a:rPr>
+              <a:t>consultas</a:t>
+            </a:r>
+            <a:endParaRPr lang="en-US" sz="1900" dirty="0"/>
+          </a:p>
+        </p:txBody>
+      </p:sp>
+      <p:sp>
+        <p:nvSpPr>
+          <p:cNvPr id="179" name="Shape 1">
+            <a:extLst>
+              <a:ext uri="{FF2B5EF4-FFF2-40B4-BE49-F238E27FC236}">
+                <a16:creationId xmlns:a16="http://schemas.microsoft.com/office/drawing/2014/main" id="{C37E475B-35FC-7431-67E6-BDC2CC036B1C}"/>
+              </a:ext>
+            </a:extLst>
+          </p:cNvPr>
+          <p:cNvSpPr/>
+          <p:nvPr/>
+        </p:nvSpPr>
+        <p:spPr>
+          <a:xfrm>
+            <a:off x="228600" y="353060"/>
+            <a:ext cx="11704320" cy="18288"/>
+          </a:xfrm>
+          <a:prstGeom prst="rect">
+            <a:avLst/>
+          </a:prstGeom>
+          <a:solidFill>
+            <a:srgbClr val="DDDDDD"/>
+          </a:solidFill>
+          <a:ln w="12700">
+            <a:solidFill>
+              <a:srgbClr val="DDDDDD"/>
+            </a:solidFill>
+            <a:prstDash val="solid"/>
+          </a:ln>
+        </p:spPr>
+        <p:txBody>
+          <a:bodyPr/>
+          <a:lstStyle/>
+          <a:p>
+            <a:endParaRPr lang="es-ES"/>
+          </a:p>
+        </p:txBody>
+      </p:sp>
     </p:spTree>
     <p:extLst>
       <p:ext uri="{BB962C8B-B14F-4D97-AF65-F5344CB8AC3E}">
@@ -12490,7 +15489,9 @@
             <a:ext cx="217062" cy="2364"/>
           </a:xfrm>
           <a:prstGeom prst="bentConnector3">
-            <a:avLst/>
+            <a:avLst>
+              <a:gd name="adj1" fmla="val 50000"/>
+            </a:avLst>
           </a:prstGeom>
           <a:ln>
             <a:tailEnd type="triangle"/>
@@ -25931,20 +28932,20 @@
 </file>
 
 <file path=customXml/item2.xml><?xml version="1.0" encoding="utf-8"?>
+<p:properties xmlns:p="http://schemas.microsoft.com/office/2006/metadata/properties" xmlns:xsi="http://www.w3.org/2001/XMLSchema-instance" xmlns:pc="http://schemas.microsoft.com/office/infopath/2007/PartnerControls">
+  <documentManagement>
+    <_activity xmlns="da169425-153d-4080-8705-45c92938e7f0" xsi:nil="true"/>
+  </documentManagement>
+</p:properties>
+</file>
+
+<file path=customXml/item3.xml><?xml version="1.0" encoding="utf-8"?>
 <?mso-contentType ?>
 <FormTemplates xmlns="http://schemas.microsoft.com/sharepoint/v3/contenttype/forms">
   <Display>DocumentLibraryForm</Display>
   <Edit>DocumentLibraryForm</Edit>
   <New>DocumentLibraryForm</New>
 </FormTemplates>
-</file>
-
-<file path=customXml/item3.xml><?xml version="1.0" encoding="utf-8"?>
-<p:properties xmlns:p="http://schemas.microsoft.com/office/2006/metadata/properties" xmlns:xsi="http://www.w3.org/2001/XMLSchema-instance" xmlns:pc="http://schemas.microsoft.com/office/infopath/2007/PartnerControls">
-  <documentManagement>
-    <_activity xmlns="da169425-153d-4080-8705-45c92938e7f0" xsi:nil="true"/>
-  </documentManagement>
-</p:properties>
 </file>
 
 <file path=customXml/itemProps1.xml><?xml version="1.0" encoding="utf-8"?>
@@ -25967,14 +28968,6 @@
 </file>
 
 <file path=customXml/itemProps2.xml><?xml version="1.0" encoding="utf-8"?>
-<ds:datastoreItem xmlns:ds="http://schemas.openxmlformats.org/officeDocument/2006/customXml" ds:itemID="{4E1C400D-5C3C-43E3-9C88-F800C5BA2249}">
-  <ds:schemaRefs>
-    <ds:schemaRef ds:uri="http://schemas.microsoft.com/sharepoint/v3/contenttype/forms"/>
-  </ds:schemaRefs>
-</ds:datastoreItem>
-</file>
-
-<file path=customXml/itemProps3.xml><?xml version="1.0" encoding="utf-8"?>
 <ds:datastoreItem xmlns:ds="http://schemas.openxmlformats.org/officeDocument/2006/customXml" ds:itemID="{E10D70F7-8416-46C5-896C-E4C67671FD25}">
   <ds:schemaRefs>
     <ds:schemaRef ds:uri="89f1de4a-40f7-4e81-987b-401414521485"/>
@@ -25989,4 +28982,12 @@
     <ds:schemaRef ds:uri="http://purl.org/dc/terms/"/>
   </ds:schemaRefs>
 </ds:datastoreItem>
+</file>
+
+<file path=customXml/itemProps3.xml><?xml version="1.0" encoding="utf-8"?>
+<ds:datastoreItem xmlns:ds="http://schemas.openxmlformats.org/officeDocument/2006/customXml" ds:itemID="{4E1C400D-5C3C-43E3-9C88-F800C5BA2249}">
+  <ds:schemaRefs>
+    <ds:schemaRef ds:uri="http://schemas.microsoft.com/sharepoint/v3/contenttype/forms"/>
+  </ds:schemaRefs>
+</ds:datastoreItem>
 </file>